--- a/q3-finance-report/Q3_2026_Finance_Report.pptx
+++ b/q3-finance-report/Q3_2026_Finance_Report.pptx
@@ -3295,7 +3295,7 @@
                 </a:solidFill>
                 <a:latin typeface="Aptos"/>
               </a:rPr>
-              <a:t>Q3 operating cash was positive overall at RM2.27M, but negative in July after a RM1.03M SST payment. Net cash flow was (RM2.88M), mainly from RM3.34M new-branch capex and a RM2.00M fixed deposit placement.</a:t>
+              <a:t>Q3 operating cash was positive overall at RM2.47M, but negative in July after a RM1.03M SST payment. Net cash flow was (RM2.88M), mainly from RM3.34M new-branch capex and a RM2.00M fixed deposit placement.</a:t>
             </a:r>
           </a:p>
         </p:txBody>
@@ -3330,7 +3330,7 @@
                 </a:solidFill>
                 <a:latin typeface="Aptos"/>
               </a:rPr>
-              <a:t>Source: TGFB Cash Flow Statement PDFs for July, August and September 2026</a:t>
+              <a:t>Source: TGFB Cash Flow Statement PDFs for July, August and September 2026 (September revised upload)</a:t>
             </a:r>
           </a:p>
         </p:txBody>
@@ -3460,7 +3460,7 @@
                 </a:solidFill>
                 <a:latin typeface="Aptos"/>
               </a:rPr>
-              <a:t>RM28.95M</a:t>
+              <a:t>RM29.15M</a:t>
             </a:r>
           </a:p>
         </p:txBody>
@@ -3495,7 +3495,7 @@
                 </a:solidFill>
                 <a:latin typeface="Aptos"/>
               </a:rPr>
-              <a:t>Customers &amp; sales contribute 95.7%</a:t>
+              <a:t>Customers &amp; sales contribute 95.0%</a:t>
             </a:r>
           </a:p>
         </p:txBody>
@@ -3790,7 +3790,7 @@
                 </a:solidFill>
                 <a:latin typeface="Aptos"/>
               </a:rPr>
-              <a:t>RM2.27M</a:t>
+              <a:t>RM2.47M</a:t>
             </a:r>
           </a:p>
         </p:txBody>
@@ -4709,7 +4709,7 @@
                           </a:solidFill>
                           <a:latin typeface="Aptos"/>
                         </a:rPr>
-                        <a:t>9,919,617.17</a:t>
+                        <a:t>10,119,617.17</a:t>
                       </a:r>
                     </a:p>
                   </a:txBody>
@@ -4758,7 +4758,7 @@
                           </a:solidFill>
                           <a:latin typeface="Aptos"/>
                         </a:rPr>
-                        <a:t>28,946,566.89</a:t>
+                        <a:t>29,146,566.89</a:t>
                       </a:r>
                     </a:p>
                   </a:txBody>
@@ -4807,7 +4807,7 @@
                           </a:solidFill>
                           <a:latin typeface="Aptos"/>
                         </a:rPr>
-                        <a:t>Increased every month; Sep highest at RM9.92M</a:t>
+                        <a:t>Increased every month; Sep highest at RM10.12M</a:t>
                       </a:r>
                     </a:p>
                   </a:txBody>
@@ -5301,7 +5301,7 @@
                           </a:solidFill>
                           <a:latin typeface="Aptos"/>
                         </a:rPr>
-                        <a:t>833,010.69</a:t>
+                        <a:t>1,033,010.69</a:t>
                       </a:r>
                     </a:p>
                   </a:txBody>
@@ -5350,7 +5350,7 @@
                           </a:solidFill>
                           <a:latin typeface="Aptos"/>
                         </a:rPr>
-                        <a:t>2,273,524.59</a:t>
+                        <a:t>2,473,524.59</a:t>
                       </a:r>
                     </a:p>
                   </a:txBody>
@@ -5597,7 +5597,7 @@
                           </a:solidFill>
                           <a:latin typeface="Aptos"/>
                         </a:rPr>
-                        <a:t>(2,445,279.73)</a:t>
+                        <a:t>(2,645,279.73)</a:t>
                       </a:r>
                     </a:p>
                   </a:txBody>
@@ -5646,7 +5646,7 @@
                           </a:solidFill>
                           <a:latin typeface="Aptos"/>
                         </a:rPr>
-                        <a:t>(4,356,453.78)</a:t>
+                        <a:t>(4,556,453.78)</a:t>
                       </a:r>
                     </a:p>
                   </a:txBody>
@@ -6396,7 +6396,7 @@
                 </a:solidFill>
                 <a:latin typeface="Aptos"/>
               </a:rPr>
-              <a:t>Cash receipts grew every month from RM9.23M to RM9.92M, but SST payments in July and September (RM2.18M combined) and new-branch capex of RM3.34M pulled cash down. RM2.00M of the decline was placed in fixed deposit, not spent.</a:t>
+              <a:t>Cash receipts grew every month from RM9.23M to RM10.12M, but SST payments in July and September (RM2.18M combined) and new-branch capex of RM3.34M pulled cash down. RM2.00M of the decline was placed in fixed deposit, not spent.</a:t>
             </a:r>
           </a:p>
         </p:txBody>
@@ -6617,13 +6617,13 @@
           <a:p>
             <a:pPr algn="l"/>
             <a:r>
-              <a:rPr b="1" sz="1200">
+              <a:rPr b="1" sz="1150">
                 <a:solidFill>
                   <a:srgbClr val="0F172A"/>
                 </a:solidFill>
                 <a:latin typeface="Aptos"/>
               </a:rPr>
-              <a:t>Total cash receipts increased every month, from RM9.23M in July to RM9.92M in September. Royalty declined after July.</a:t>
+              <a:t>Total cash receipts increased every month, from RM9.23M in July to RM10.12M in September. Royalty declined after July.</a:t>
             </a:r>
           </a:p>
         </p:txBody>
@@ -6658,7 +6658,7 @@
                 </a:solidFill>
                 <a:latin typeface="Aptos"/>
               </a:rPr>
-              <a:t>Source: TGFB Cash Flow Statement PDFs for July, August and September 2026</a:t>
+              <a:t>Source: TGFB Cash Flow Statement PDFs for July, August and September 2026 (September revised upload)</a:t>
             </a:r>
           </a:p>
         </p:txBody>
@@ -7360,7 +7360,7 @@
                           </a:solidFill>
                           <a:latin typeface="Aptos"/>
                         </a:rPr>
-                        <a:t>95.7%</a:t>
+                        <a:t>95.0%</a:t>
                       </a:r>
                     </a:p>
                   </a:txBody>
@@ -7607,7 +7607,7 @@
                           </a:solidFill>
                           <a:latin typeface="Aptos"/>
                         </a:rPr>
-                        <a:t>120,000.00</a:t>
+                        <a:t>320,000.00</a:t>
                       </a:r>
                     </a:p>
                   </a:txBody>
@@ -7656,7 +7656,7 @@
                           </a:solidFill>
                           <a:latin typeface="Aptos"/>
                         </a:rPr>
-                        <a:t>130,000.00</a:t>
+                        <a:t>330,000.00</a:t>
                       </a:r>
                     </a:p>
                   </a:txBody>
@@ -7705,7 +7705,7 @@
                           </a:solidFill>
                           <a:latin typeface="Aptos"/>
                         </a:rPr>
-                        <a:t>0.4%</a:t>
+                        <a:t>1.1%</a:t>
                       </a:r>
                     </a:p>
                   </a:txBody>
@@ -7754,7 +7754,7 @@
                           </a:solidFill>
                           <a:latin typeface="Aptos"/>
                         </a:rPr>
-                        <a:t>No receipts in Jul; RM120K licensing fee in Sep</a:t>
+                        <a:t>Nil in Jul; Sep RM120K fee + RM200K package</a:t>
                       </a:r>
                     </a:p>
                   </a:txBody>
@@ -8642,7 +8642,7 @@
                           </a:solidFill>
                           <a:latin typeface="Aptos"/>
                         </a:rPr>
-                        <a:t>9,919,617.17</a:t>
+                        <a:t>10,119,617.17</a:t>
                       </a:r>
                     </a:p>
                   </a:txBody>
@@ -8691,7 +8691,7 @@
                           </a:solidFill>
                           <a:latin typeface="Aptos"/>
                         </a:rPr>
-                        <a:t>28,946,566.89</a:t>
+                        <a:t>29,146,566.89</a:t>
                       </a:r>
                     </a:p>
                   </a:txBody>
@@ -8901,7 +8901,7 @@
                 </a:solidFill>
                 <a:latin typeface="Aptos"/>
               </a:rPr>
-              <a:t>• Customers &amp; Sales contributed 95.7% of Q3 receipts.</a:t>
+              <a:t>• Customers &amp; Sales contributed 95.0% of Q3 receipts.</a:t>
             </a:r>
           </a:p>
           <a:p>
@@ -8925,7 +8925,7 @@
                 </a:solidFill>
                 <a:latin typeface="Aptos"/>
               </a:rPr>
-              <a:t>• Licensing fee receipts rose from nil in July to RM120.0K in September.</a:t>
+              <a:t>• Licensing fee &amp; package receipts rose from nil in July to RM320.0K in September.</a:t>
             </a:r>
           </a:p>
           <a:p>
@@ -9199,7 +9199,7 @@
                 </a:solidFill>
                 <a:latin typeface="Aptos"/>
               </a:rPr>
-              <a:t>Source: TGFB Cash Flow Statement PDFs for July, August and September 2026</a:t>
+              <a:t>Source: TGFB Cash Flow Statement PDFs for July, August and September 2026 (September revised upload)</a:t>
             </a:r>
           </a:p>
         </p:txBody>
@@ -17221,7 +17221,7 @@
                 </a:solidFill>
                 <a:latin typeface="Aptos"/>
               </a:rPr>
-              <a:t>Source: TGFB Cash Flow Statement PDFs for July, August and September 2026</a:t>
+              <a:t>Source: TGFB Cash Flow Statement PDFs for July, August and September 2026 (September revised upload)</a:t>
             </a:r>
           </a:p>
         </p:txBody>
@@ -17923,7 +17923,7 @@
                           </a:solidFill>
                           <a:latin typeface="Aptos"/>
                         </a:rPr>
-                        <a:t>2.9%</a:t>
+                        <a:t>3.0%</a:t>
                       </a:r>
                     </a:p>
                   </a:txBody>
@@ -18515,7 +18515,7 @@
                           </a:solidFill>
                           <a:latin typeface="Aptos"/>
                         </a:rPr>
-                        <a:t>200,000.00</a:t>
+                        <a:t>0.00</a:t>
                       </a:r>
                     </a:p>
                   </a:txBody>
@@ -18564,7 +18564,7 @@
                           </a:solidFill>
                           <a:latin typeface="Aptos"/>
                         </a:rPr>
-                        <a:t>920,000.00</a:t>
+                        <a:t>720,000.00</a:t>
                       </a:r>
                     </a:p>
                   </a:txBody>
@@ -18613,7 +18613,7 @@
                           </a:solidFill>
                           <a:latin typeface="Aptos"/>
                         </a:rPr>
-                        <a:t>14.0%</a:t>
+                        <a:t>11.3%</a:t>
                       </a:r>
                     </a:p>
                   </a:txBody>
@@ -18662,7 +18662,7 @@
                           </a:solidFill>
                           <a:latin typeface="Aptos"/>
                         </a:rPr>
-                        <a:t>Investor fund; Sep received via RHB</a:t>
+                        <a:t>Investor fund received in Jul</a:t>
                       </a:r>
                     </a:p>
                   </a:txBody>
@@ -19303,7 +19303,7 @@
                           </a:solidFill>
                           <a:latin typeface="Aptos"/>
                         </a:rPr>
-                        <a:t>2.0%</a:t>
+                        <a:t>2.1%</a:t>
                       </a:r>
                     </a:p>
                   </a:txBody>
@@ -19648,7 +19648,7 @@
                           </a:solidFill>
                           <a:latin typeface="Aptos"/>
                         </a:rPr>
-                        <a:t>50.7%</a:t>
+                        <a:t>52.3%</a:t>
                       </a:r>
                     </a:p>
                   </a:txBody>
@@ -19993,7 +19993,7 @@
                           </a:solidFill>
                           <a:latin typeface="Aptos"/>
                         </a:rPr>
-                        <a:t>30.3%</a:t>
+                        <a:t>31.3%</a:t>
                       </a:r>
                     </a:p>
                   </a:txBody>
@@ -20585,7 +20585,7 @@
                           </a:solidFill>
                           <a:latin typeface="Aptos"/>
                         </a:rPr>
-                        <a:t>(2,445,279.73)</a:t>
+                        <a:t>(2,645,279.73)</a:t>
                       </a:r>
                     </a:p>
                   </a:txBody>
@@ -20634,7 +20634,7 @@
                           </a:solidFill>
                           <a:latin typeface="Aptos"/>
                         </a:rPr>
-                        <a:t>(4,356,453.78)</a:t>
+                        <a:t>(4,556,453.78)</a:t>
                       </a:r>
                     </a:p>
                   </a:txBody>

--- a/q3-finance-report/Q3_2026_Finance_Report.pptx
+++ b/q3-finance-report/Q3_2026_Finance_Report.pptx
@@ -3309,7 +3309,7 @@
         <p:spPr>
           <a:xfrm>
             <a:off x="256032" y="6675120"/>
-            <a:ext cx="7315200" cy="137160"/>
+            <a:ext cx="10972800" cy="137160"/>
           </a:xfrm>
           <a:prstGeom prst="rect">
             <a:avLst/>
@@ -3330,7 +3330,7 @@
                 </a:solidFill>
                 <a:latin typeface="Aptos"/>
               </a:rPr>
-              <a:t>Source: TGFB Cash Flow Statement PDFs for July, August and September 2026 (September revised upload)</a:t>
+              <a:t>Source: TGFB Cash Flow Statement PDFs for July, August and September 2026 (September revised upload). Sep RM229K investor fund reclassified from financing to investing, consistent with Jul and Q2.</a:t>
             </a:r>
           </a:p>
         </p:txBody>
@@ -5597,7 +5597,7 @@
                           </a:solidFill>
                           <a:latin typeface="Aptos"/>
                         </a:rPr>
-                        <a:t>(2,645,279.73)</a:t>
+                        <a:t>(2,416,279.73)</a:t>
                       </a:r>
                     </a:p>
                   </a:txBody>
@@ -5646,7 +5646,7 @@
                           </a:solidFill>
                           <a:latin typeface="Aptos"/>
                         </a:rPr>
-                        <a:t>(4,556,453.78)</a:t>
+                        <a:t>(4,327,453.78)</a:t>
                       </a:r>
                     </a:p>
                   </a:txBody>
@@ -5893,7 +5893,7 @@
                           </a:solidFill>
                           <a:latin typeface="Aptos"/>
                         </a:rPr>
-                        <a:t>(107,801.93)</a:t>
+                        <a:t>(336,801.93)</a:t>
                       </a:r>
                     </a:p>
                   </a:txBody>
@@ -5942,7 +5942,7 @@
                           </a:solidFill>
                           <a:latin typeface="Aptos"/>
                         </a:rPr>
-                        <a:t>(792,374.42)</a:t>
+                        <a:t>(1,021,374.42)</a:t>
                       </a:r>
                     </a:p>
                   </a:txBody>
@@ -6637,7 +6637,7 @@
         <p:spPr>
           <a:xfrm>
             <a:off x="256032" y="6675120"/>
-            <a:ext cx="7315200" cy="137160"/>
+            <a:ext cx="10972800" cy="137160"/>
           </a:xfrm>
           <a:prstGeom prst="rect">
             <a:avLst/>
@@ -6658,7 +6658,7 @@
                 </a:solidFill>
                 <a:latin typeface="Aptos"/>
               </a:rPr>
-              <a:t>Source: TGFB Cash Flow Statement PDFs for July, August and September 2026 (September revised upload)</a:t>
+              <a:t>Source: TGFB Cash Flow Statement PDFs for July, August and September 2026 (September revised upload). Sep RM229K investor fund reclassified from financing to investing, consistent with Jul and Q2.</a:t>
             </a:r>
           </a:p>
         </p:txBody>
@@ -9178,7 +9178,7 @@
         <p:spPr>
           <a:xfrm>
             <a:off x="256032" y="6675120"/>
-            <a:ext cx="7315200" cy="137160"/>
+            <a:ext cx="10972800" cy="137160"/>
           </a:xfrm>
           <a:prstGeom prst="rect">
             <a:avLst/>
@@ -9199,7 +9199,7 @@
                 </a:solidFill>
                 <a:latin typeface="Aptos"/>
               </a:rPr>
-              <a:t>Source: TGFB Cash Flow Statement PDFs for July, August and September 2026 (September revised upload)</a:t>
+              <a:t>Source: TGFB Cash Flow Statement PDFs for July, August and September 2026 (September revised upload). Sep RM229K investor fund reclassified from financing to investing, consistent with Jul and Q2.</a:t>
             </a:r>
           </a:p>
         </p:txBody>
@@ -17200,7 +17200,7 @@
         <p:spPr>
           <a:xfrm>
             <a:off x="256032" y="6675120"/>
-            <a:ext cx="7315200" cy="137160"/>
+            <a:ext cx="10972800" cy="137160"/>
           </a:xfrm>
           <a:prstGeom prst="rect">
             <a:avLst/>
@@ -17221,7 +17221,7 @@
                 </a:solidFill>
                 <a:latin typeface="Aptos"/>
               </a:rPr>
-              <a:t>Source: TGFB Cash Flow Statement PDFs for July, August and September 2026 (September revised upload)</a:t>
+              <a:t>Source: TGFB Cash Flow Statement PDFs for July, August and September 2026 (September revised upload). Sep RM229K investor fund reclassified from financing to investing, consistent with Jul and Q2.</a:t>
             </a:r>
           </a:p>
         </p:txBody>
@@ -17923,7 +17923,7 @@
                           </a:solidFill>
                           <a:latin typeface="Aptos"/>
                         </a:rPr>
-                        <a:t>3.0%</a:t>
+                        <a:t>2.9%</a:t>
                       </a:r>
                     </a:p>
                   </a:txBody>
@@ -18515,7 +18515,7 @@
                           </a:solidFill>
                           <a:latin typeface="Aptos"/>
                         </a:rPr>
-                        <a:t>0.00</a:t>
+                        <a:t>229,000.00</a:t>
                       </a:r>
                     </a:p>
                   </a:txBody>
@@ -18564,7 +18564,7 @@
                           </a:solidFill>
                           <a:latin typeface="Aptos"/>
                         </a:rPr>
-                        <a:t>720,000.00</a:t>
+                        <a:t>949,000.00</a:t>
                       </a:r>
                     </a:p>
                   </a:txBody>
@@ -18613,7 +18613,7 @@
                           </a:solidFill>
                           <a:latin typeface="Aptos"/>
                         </a:rPr>
-                        <a:t>11.3%</a:t>
+                        <a:t>14.3%</a:t>
                       </a:r>
                     </a:p>
                   </a:txBody>
@@ -18662,7 +18662,7 @@
                           </a:solidFill>
                           <a:latin typeface="Aptos"/>
                         </a:rPr>
-                        <a:t>Investor fund received in Jul</a:t>
+                        <a:t>Investor fund; Sep reclassified from financing</a:t>
                       </a:r>
                     </a:p>
                   </a:txBody>
@@ -19303,7 +19303,7 @@
                           </a:solidFill>
                           <a:latin typeface="Aptos"/>
                         </a:rPr>
-                        <a:t>2.1%</a:t>
+                        <a:t>2.0%</a:t>
                       </a:r>
                     </a:p>
                   </a:txBody>
@@ -19648,7 +19648,7 @@
                           </a:solidFill>
                           <a:latin typeface="Aptos"/>
                         </a:rPr>
-                        <a:t>52.3%</a:t>
+                        <a:t>50.5%</a:t>
                       </a:r>
                     </a:p>
                   </a:txBody>
@@ -19993,7 +19993,7 @@
                           </a:solidFill>
                           <a:latin typeface="Aptos"/>
                         </a:rPr>
-                        <a:t>31.3%</a:t>
+                        <a:t>30.2%</a:t>
                       </a:r>
                     </a:p>
                   </a:txBody>
@@ -20585,7 +20585,7 @@
                           </a:solidFill>
                           <a:latin typeface="Aptos"/>
                         </a:rPr>
-                        <a:t>(2,645,279.73)</a:t>
+                        <a:t>(2,416,279.73)</a:t>
                       </a:r>
                     </a:p>
                   </a:txBody>
@@ -20634,7 +20634,7 @@
                           </a:solidFill>
                           <a:latin typeface="Aptos"/>
                         </a:rPr>
-                        <a:t>(4,556,453.78)</a:t>
+                        <a:t>(4,327,453.78)</a:t>
                       </a:r>
                     </a:p>
                   </a:txBody>
@@ -20845,7 +20845,7 @@
         </p:nvGraphicFramePr>
         <p:xfrm>
           <a:off x="256032" y="3730752"/>
-          <a:ext cx="11676888" cy="2377440"/>
+          <a:ext cx="11676888" cy="2194560"/>
         </p:xfrm>
         <a:graphic>
           <a:graphicData uri="http://schemas.openxmlformats.org/drawingml/2006/table">
@@ -21913,7 +21913,7 @@
                           </a:solidFill>
                           <a:latin typeface="Aptos"/>
                         </a:rPr>
-                        <a:t>Collection of Investor funds</a:t>
+                        <a:t>Borrowing</a:t>
                       </a:r>
                     </a:p>
                   </a:txBody>
@@ -22060,7 +22060,7 @@
                           </a:solidFill>
                           <a:latin typeface="Aptos"/>
                         </a:rPr>
-                        <a:t>229,000.00</a:t>
+                        <a:t>0.00</a:t>
                       </a:r>
                     </a:p>
                   </a:txBody>
@@ -22109,7 +22109,7 @@
                           </a:solidFill>
                           <a:latin typeface="Aptos"/>
                         </a:rPr>
-                        <a:t>229,000.00</a:t>
+                        <a:t>0.00</a:t>
                       </a:r>
                     </a:p>
                   </a:txBody>
@@ -22158,7 +22158,7 @@
                           </a:solidFill>
                           <a:latin typeface="Aptos"/>
                         </a:rPr>
-                        <a:t>13.1%</a:t>
+                        <a:t>0.0%</a:t>
                       </a:r>
                     </a:p>
                   </a:txBody>
@@ -22207,7 +22207,7 @@
                           </a:solidFill>
                           <a:latin typeface="Aptos"/>
                         </a:rPr>
-                        <a:t>Investor fund recorded under financing in Sep</a:t>
+                        <a:t> </a:t>
                       </a:r>
                     </a:p>
                   </a:txBody>
@@ -22258,7 +22258,7 @@
                           </a:solidFill>
                           <a:latin typeface="Aptos"/>
                         </a:rPr>
-                        <a:t>Borrowing</a:t>
+                        <a:t>Repayment from related parties</a:t>
                       </a:r>
                     </a:p>
                   </a:txBody>
@@ -22303,11 +22303,11 @@
                       <a:r>
                         <a:rPr b="1" sz="800">
                           <a:solidFill>
-                            <a:srgbClr val="0F172A"/>
-                          </a:solidFill>
-                          <a:latin typeface="Aptos"/>
-                        </a:rPr>
-                        <a:t>0.00</a:t>
+                            <a:srgbClr val="C00000"/>
+                          </a:solidFill>
+                          <a:latin typeface="Aptos"/>
+                        </a:rPr>
+                        <a:t>(79,760.50)</a:t>
                       </a:r>
                     </a:p>
                   </a:txBody>
@@ -22356,7 +22356,7 @@
                           </a:solidFill>
                           <a:latin typeface="Aptos"/>
                         </a:rPr>
-                        <a:t>0.00</a:t>
+                        <a:t>230,281.85</a:t>
                       </a:r>
                     </a:p>
                   </a:txBody>
@@ -22405,7 +22405,7 @@
                           </a:solidFill>
                           <a:latin typeface="Aptos"/>
                         </a:rPr>
-                        <a:t>0.00</a:t>
+                        <a:t>15,899.00</a:t>
                       </a:r>
                     </a:p>
                   </a:txBody>
@@ -22454,7 +22454,7 @@
                           </a:solidFill>
                           <a:latin typeface="Aptos"/>
                         </a:rPr>
-                        <a:t>0.00</a:t>
+                        <a:t>166,420.35</a:t>
                       </a:r>
                     </a:p>
                   </a:txBody>
@@ -22503,7 +22503,7 @@
                           </a:solidFill>
                           <a:latin typeface="Aptos"/>
                         </a:rPr>
-                        <a:t>0.0%</a:t>
+                        <a:t>21.5%</a:t>
                       </a:r>
                     </a:p>
                   </a:txBody>
@@ -22552,7 +22552,7 @@
                           </a:solidFill>
                           <a:latin typeface="Aptos"/>
                         </a:rPr>
-                        <a:t> </a:t>
+                        <a:t>Net outflow in Jul; RM230.3K received in Aug</a:t>
                       </a:r>
                     </a:p>
                   </a:txBody>
@@ -22603,7 +22603,7 @@
                           </a:solidFill>
                           <a:latin typeface="Aptos"/>
                         </a:rPr>
-                        <a:t>Repayment from related parties</a:t>
+                        <a:t>Purchase of investment</a:t>
                       </a:r>
                     </a:p>
                   </a:txBody>
@@ -22652,7 +22652,7 @@
                           </a:solidFill>
                           <a:latin typeface="Aptos"/>
                         </a:rPr>
-                        <a:t>(79,760.50)</a:t>
+                        <a:t>(286,293.00)</a:t>
                       </a:r>
                     </a:p>
                   </a:txBody>
@@ -22701,7 +22701,7 @@
                           </a:solidFill>
                           <a:latin typeface="Aptos"/>
                         </a:rPr>
-                        <a:t>230,281.85</a:t>
+                        <a:t>0.00</a:t>
                       </a:r>
                     </a:p>
                   </a:txBody>
@@ -22750,7 +22750,7 @@
                           </a:solidFill>
                           <a:latin typeface="Aptos"/>
                         </a:rPr>
-                        <a:t>15,899.00</a:t>
+                        <a:t>0.00</a:t>
                       </a:r>
                     </a:p>
                   </a:txBody>
@@ -22795,11 +22795,11 @@
                       <a:r>
                         <a:rPr b="1" sz="800">
                           <a:solidFill>
-                            <a:srgbClr val="0F172A"/>
-                          </a:solidFill>
-                          <a:latin typeface="Aptos"/>
-                        </a:rPr>
-                        <a:t>166,420.35</a:t>
+                            <a:srgbClr val="C00000"/>
+                          </a:solidFill>
+                          <a:latin typeface="Aptos"/>
+                        </a:rPr>
+                        <a:t>(286,293.00)</a:t>
                       </a:r>
                     </a:p>
                   </a:txBody>
@@ -22848,7 +22848,7 @@
                           </a:solidFill>
                           <a:latin typeface="Aptos"/>
                         </a:rPr>
-                        <a:t>18.7%</a:t>
+                        <a:t>18.9%</a:t>
                       </a:r>
                     </a:p>
                   </a:txBody>
@@ -22897,7 +22897,7 @@
                           </a:solidFill>
                           <a:latin typeface="Aptos"/>
                         </a:rPr>
-                        <a:t>Net outflow in Jul; RM230.3K received in Aug</a:t>
+                        <a:t>Jul only (recorded under financing)</a:t>
                       </a:r>
                     </a:p>
                   </a:txBody>
@@ -22948,7 +22948,7 @@
                           </a:solidFill>
                           <a:latin typeface="Aptos"/>
                         </a:rPr>
-                        <a:t>Purchase of investment</a:t>
+                        <a:t>Repayment of loans</a:t>
                       </a:r>
                     </a:p>
                   </a:txBody>
@@ -22997,7 +22997,7 @@
                           </a:solidFill>
                           <a:latin typeface="Aptos"/>
                         </a:rPr>
-                        <a:t>(286,293.00)</a:t>
+                        <a:t>(159,745.15)</a:t>
                       </a:r>
                     </a:p>
                   </a:txBody>
@@ -23042,11 +23042,11 @@
                       <a:r>
                         <a:rPr b="1" sz="800">
                           <a:solidFill>
-                            <a:srgbClr val="0F172A"/>
-                          </a:solidFill>
-                          <a:latin typeface="Aptos"/>
-                        </a:rPr>
-                        <a:t>0.00</a:t>
+                            <a:srgbClr val="C00000"/>
+                          </a:solidFill>
+                          <a:latin typeface="Aptos"/>
+                        </a:rPr>
+                        <a:t>(155,237.00)</a:t>
                       </a:r>
                     </a:p>
                   </a:txBody>
@@ -23091,11 +23091,11 @@
                       <a:r>
                         <a:rPr b="1" sz="800">
                           <a:solidFill>
-                            <a:srgbClr val="0F172A"/>
-                          </a:solidFill>
-                          <a:latin typeface="Aptos"/>
-                        </a:rPr>
-                        <a:t>0.00</a:t>
+                            <a:srgbClr val="C00000"/>
+                          </a:solidFill>
+                          <a:latin typeface="Aptos"/>
+                        </a:rPr>
+                        <a:t>(159,887.29)</a:t>
                       </a:r>
                     </a:p>
                   </a:txBody>
@@ -23144,7 +23144,7 @@
                           </a:solidFill>
                           <a:latin typeface="Aptos"/>
                         </a:rPr>
-                        <a:t>(286,293.00)</a:t>
+                        <a:t>(474,869.44)</a:t>
                       </a:r>
                     </a:p>
                   </a:txBody>
@@ -23193,7 +23193,7 @@
                           </a:solidFill>
                           <a:latin typeface="Aptos"/>
                         </a:rPr>
-                        <a:t>16.4%</a:t>
+                        <a:t>31.4%</a:t>
                       </a:r>
                     </a:p>
                   </a:txBody>
@@ -23242,7 +23242,7 @@
                           </a:solidFill>
                           <a:latin typeface="Aptos"/>
                         </a:rPr>
-                        <a:t>Jul only (recorded under financing)</a:t>
+                        <a:t>Stable at about RM155K-RM160K monthly</a:t>
                       </a:r>
                     </a:p>
                   </a:txBody>
@@ -23293,7 +23293,7 @@
                           </a:solidFill>
                           <a:latin typeface="Aptos"/>
                         </a:rPr>
-                        <a:t>Repayment of loans</a:t>
+                        <a:t>Dividends</a:t>
                       </a:r>
                     </a:p>
                   </a:txBody>
@@ -23338,11 +23338,11 @@
                       <a:r>
                         <a:rPr b="1" sz="800">
                           <a:solidFill>
-                            <a:srgbClr val="C00000"/>
-                          </a:solidFill>
-                          <a:latin typeface="Aptos"/>
-                        </a:rPr>
-                        <a:t>(159,745.15)</a:t>
+                            <a:srgbClr val="0F172A"/>
+                          </a:solidFill>
+                          <a:latin typeface="Aptos"/>
+                        </a:rPr>
+                        <a:t>0.00</a:t>
                       </a:r>
                     </a:p>
                   </a:txBody>
@@ -23387,11 +23387,11 @@
                       <a:r>
                         <a:rPr b="1" sz="800">
                           <a:solidFill>
-                            <a:srgbClr val="C00000"/>
-                          </a:solidFill>
-                          <a:latin typeface="Aptos"/>
-                        </a:rPr>
-                        <a:t>(155,237.00)</a:t>
+                            <a:srgbClr val="0F172A"/>
+                          </a:solidFill>
+                          <a:latin typeface="Aptos"/>
+                        </a:rPr>
+                        <a:t>0.00</a:t>
                       </a:r>
                     </a:p>
                   </a:txBody>
@@ -23436,11 +23436,11 @@
                       <a:r>
                         <a:rPr b="1" sz="800">
                           <a:solidFill>
-                            <a:srgbClr val="C00000"/>
-                          </a:solidFill>
-                          <a:latin typeface="Aptos"/>
-                        </a:rPr>
-                        <a:t>(159,887.29)</a:t>
+                            <a:srgbClr val="0F172A"/>
+                          </a:solidFill>
+                          <a:latin typeface="Aptos"/>
+                        </a:rPr>
+                        <a:t>0.00</a:t>
                       </a:r>
                     </a:p>
                   </a:txBody>
@@ -23485,11 +23485,11 @@
                       <a:r>
                         <a:rPr b="1" sz="800">
                           <a:solidFill>
-                            <a:srgbClr val="C00000"/>
-                          </a:solidFill>
-                          <a:latin typeface="Aptos"/>
-                        </a:rPr>
-                        <a:t>(474,869.44)</a:t>
+                            <a:srgbClr val="0F172A"/>
+                          </a:solidFill>
+                          <a:latin typeface="Aptos"/>
+                        </a:rPr>
+                        <a:t>0.00</a:t>
                       </a:r>
                     </a:p>
                   </a:txBody>
@@ -23538,7 +23538,7 @@
                           </a:solidFill>
                           <a:latin typeface="Aptos"/>
                         </a:rPr>
-                        <a:t>27.2%</a:t>
+                        <a:t>0.0%</a:t>
                       </a:r>
                     </a:p>
                   </a:txBody>
@@ -23587,7 +23587,7 @@
                           </a:solidFill>
                           <a:latin typeface="Aptos"/>
                         </a:rPr>
-                        <a:t>Stable at about RM155K-RM160K monthly</a:t>
+                        <a:t> </a:t>
                       </a:r>
                     </a:p>
                   </a:txBody>
@@ -23638,7 +23638,7 @@
                           </a:solidFill>
                           <a:latin typeface="Aptos"/>
                         </a:rPr>
-                        <a:t>Dividends</a:t>
+                        <a:t>Advance to related parties</a:t>
                       </a:r>
                     </a:p>
                   </a:txBody>
@@ -23683,11 +23683,11 @@
                       <a:r>
                         <a:rPr b="1" sz="800">
                           <a:solidFill>
-                            <a:srgbClr val="0F172A"/>
-                          </a:solidFill>
-                          <a:latin typeface="Aptos"/>
-                        </a:rPr>
-                        <a:t>0.00</a:t>
+                            <a:srgbClr val="C00000"/>
+                          </a:solidFill>
+                          <a:latin typeface="Aptos"/>
+                        </a:rPr>
+                        <a:t>(233,400.76)</a:t>
                       </a:r>
                     </a:p>
                   </a:txBody>
@@ -23732,11 +23732,11 @@
                       <a:r>
                         <a:rPr b="1" sz="800">
                           <a:solidFill>
-                            <a:srgbClr val="0F172A"/>
-                          </a:solidFill>
-                          <a:latin typeface="Aptos"/>
-                        </a:rPr>
-                        <a:t>0.00</a:t>
+                            <a:srgbClr val="C00000"/>
+                          </a:solidFill>
+                          <a:latin typeface="Aptos"/>
+                        </a:rPr>
+                        <a:t>(417.93)</a:t>
                       </a:r>
                     </a:p>
                   </a:txBody>
@@ -23781,11 +23781,11 @@
                       <a:r>
                         <a:rPr b="1" sz="800">
                           <a:solidFill>
-                            <a:srgbClr val="0F172A"/>
-                          </a:solidFill>
-                          <a:latin typeface="Aptos"/>
-                        </a:rPr>
-                        <a:t>0.00</a:t>
+                            <a:srgbClr val="C00000"/>
+                          </a:solidFill>
+                          <a:latin typeface="Aptos"/>
+                        </a:rPr>
+                        <a:t>(192,813.64)</a:t>
                       </a:r>
                     </a:p>
                   </a:txBody>
@@ -23830,11 +23830,11 @@
                       <a:r>
                         <a:rPr b="1" sz="800">
                           <a:solidFill>
-                            <a:srgbClr val="0F172A"/>
-                          </a:solidFill>
-                          <a:latin typeface="Aptos"/>
-                        </a:rPr>
-                        <a:t>0.00</a:t>
+                            <a:srgbClr val="C00000"/>
+                          </a:solidFill>
+                          <a:latin typeface="Aptos"/>
+                        </a:rPr>
+                        <a:t>(426,632.33)</a:t>
                       </a:r>
                     </a:p>
                   </a:txBody>
@@ -23883,7 +23883,7 @@
                           </a:solidFill>
                           <a:latin typeface="Aptos"/>
                         </a:rPr>
-                        <a:t>0.0%</a:t>
+                        <a:t>28.2%</a:t>
                       </a:r>
                     </a:p>
                   </a:txBody>
@@ -23932,7 +23932,7 @@
                           </a:solidFill>
                           <a:latin typeface="Aptos"/>
                         </a:rPr>
-                        <a:t> </a:t>
+                        <a:t>Jul-26 highest; Aug-26 minimal</a:t>
                       </a:r>
                     </a:p>
                   </a:txBody>
@@ -23983,7 +23983,7 @@
                           </a:solidFill>
                           <a:latin typeface="Aptos"/>
                         </a:rPr>
-                        <a:t>Advance to related parties</a:t>
+                        <a:t>Repayment to related parties</a:t>
                       </a:r>
                     </a:p>
                   </a:txBody>
@@ -24028,11 +24028,11 @@
                       <a:r>
                         <a:rPr b="1" sz="800">
                           <a:solidFill>
-                            <a:srgbClr val="C00000"/>
-                          </a:solidFill>
-                          <a:latin typeface="Aptos"/>
-                        </a:rPr>
-                        <a:t>(233,400.76)</a:t>
+                            <a:srgbClr val="0F172A"/>
+                          </a:solidFill>
+                          <a:latin typeface="Aptos"/>
+                        </a:rPr>
+                        <a:t>0.00</a:t>
                       </a:r>
                     </a:p>
                   </a:txBody>
@@ -24077,11 +24077,11 @@
                       <a:r>
                         <a:rPr b="1" sz="800">
                           <a:solidFill>
-                            <a:srgbClr val="C00000"/>
-                          </a:solidFill>
-                          <a:latin typeface="Aptos"/>
-                        </a:rPr>
-                        <a:t>(417.93)</a:t>
+                            <a:srgbClr val="0F172A"/>
+                          </a:solidFill>
+                          <a:latin typeface="Aptos"/>
+                        </a:rPr>
+                        <a:t>0.00</a:t>
                       </a:r>
                     </a:p>
                   </a:txBody>
@@ -24126,11 +24126,11 @@
                       <a:r>
                         <a:rPr b="1" sz="800">
                           <a:solidFill>
-                            <a:srgbClr val="C00000"/>
-                          </a:solidFill>
-                          <a:latin typeface="Aptos"/>
-                        </a:rPr>
-                        <a:t>(192,813.64)</a:t>
+                            <a:srgbClr val="0F172A"/>
+                          </a:solidFill>
+                          <a:latin typeface="Aptos"/>
+                        </a:rPr>
+                        <a:t>0.00</a:t>
                       </a:r>
                     </a:p>
                   </a:txBody>
@@ -24175,11 +24175,11 @@
                       <a:r>
                         <a:rPr b="1" sz="800">
                           <a:solidFill>
-                            <a:srgbClr val="C00000"/>
-                          </a:solidFill>
-                          <a:latin typeface="Aptos"/>
-                        </a:rPr>
-                        <a:t>(426,632.33)</a:t>
+                            <a:srgbClr val="0F172A"/>
+                          </a:solidFill>
+                          <a:latin typeface="Aptos"/>
+                        </a:rPr>
+                        <a:t>0.00</a:t>
                       </a:r>
                     </a:p>
                   </a:txBody>
@@ -24228,7 +24228,7 @@
                           </a:solidFill>
                           <a:latin typeface="Aptos"/>
                         </a:rPr>
-                        <a:t>24.5%</a:t>
+                        <a:t>0.0%</a:t>
                       </a:r>
                     </a:p>
                   </a:txBody>
@@ -24277,7 +24277,7 @@
                           </a:solidFill>
                           <a:latin typeface="Aptos"/>
                         </a:rPr>
-                        <a:t>Jul-26 highest; Aug-26 minimal</a:t>
+                        <a:t> </a:t>
                       </a:r>
                     </a:p>
                   </a:txBody>
@@ -24328,7 +24328,7 @@
                           </a:solidFill>
                           <a:latin typeface="Aptos"/>
                         </a:rPr>
-                        <a:t>Repayment to related parties</a:t>
+                        <a:t>Pending</a:t>
                       </a:r>
                     </a:p>
                   </a:txBody>
@@ -24669,41 +24669,41 @@
                       <a:r>
                         <a:rPr b="1" sz="800">
                           <a:solidFill>
-                            <a:srgbClr val="0F172A"/>
-                          </a:solidFill>
-                          <a:latin typeface="Aptos"/>
-                        </a:rPr>
-                        <a:t>Pending</a:t>
-                      </a:r>
-                    </a:p>
-                  </a:txBody>
-                  <a:tcPr marL="45720" marR="45720" marT="0" marB="0" anchor="ctr">
-                    <a:lnL w="12700" cap="flat" cmpd="sng" algn="ctr">
-                      <a:solidFill>
-                        <a:srgbClr val="FFFFFF"/>
-                      </a:solidFill>
-                      <a:prstDash val="solid"/>
-                    </a:lnL>
-                    <a:lnR w="12700" cap="flat" cmpd="sng" algn="ctr">
-                      <a:solidFill>
-                        <a:srgbClr val="FFFFFF"/>
-                      </a:solidFill>
-                      <a:prstDash val="solid"/>
-                    </a:lnR>
-                    <a:lnT w="12700" cap="flat" cmpd="sng" algn="ctr">
-                      <a:solidFill>
-                        <a:srgbClr val="FFFFFF"/>
-                      </a:solidFill>
-                      <a:prstDash val="solid"/>
-                    </a:lnT>
-                    <a:lnB w="12700" cap="flat" cmpd="sng" algn="ctr">
-                      <a:solidFill>
-                        <a:srgbClr val="FFFFFF"/>
-                      </a:solidFill>
-                      <a:prstDash val="solid"/>
-                    </a:lnB>
-                    <a:solidFill>
-                      <a:srgbClr val="FFF2B3"/>
+                            <a:srgbClr val="FFFFFF"/>
+                          </a:solidFill>
+                          <a:latin typeface="Aptos"/>
+                        </a:rPr>
+                        <a:t>NET FINANCING ACTIVITIES</a:t>
+                      </a:r>
+                    </a:p>
+                  </a:txBody>
+                  <a:tcPr marL="45720" marR="45720" marT="0" marB="0" anchor="ctr">
+                    <a:lnL w="12700" cap="flat" cmpd="sng" algn="ctr">
+                      <a:solidFill>
+                        <a:srgbClr val="FFFFFF"/>
+                      </a:solidFill>
+                      <a:prstDash val="solid"/>
+                    </a:lnL>
+                    <a:lnR w="12700" cap="flat" cmpd="sng" algn="ctr">
+                      <a:solidFill>
+                        <a:srgbClr val="FFFFFF"/>
+                      </a:solidFill>
+                      <a:prstDash val="solid"/>
+                    </a:lnR>
+                    <a:lnT w="12700" cap="flat" cmpd="sng" algn="ctr">
+                      <a:solidFill>
+                        <a:srgbClr val="FFFFFF"/>
+                      </a:solidFill>
+                      <a:prstDash val="solid"/>
+                    </a:lnT>
+                    <a:lnB w="12700" cap="flat" cmpd="sng" algn="ctr">
+                      <a:solidFill>
+                        <a:srgbClr val="FFFFFF"/>
+                      </a:solidFill>
+                      <a:prstDash val="solid"/>
+                    </a:lnB>
+                    <a:solidFill>
+                      <a:srgbClr val="081E42"/>
                     </a:solidFill>
                   </a:tcPr>
                 </a:tc>
@@ -24718,41 +24718,41 @@
                       <a:r>
                         <a:rPr b="1" sz="800">
                           <a:solidFill>
-                            <a:srgbClr val="0F172A"/>
-                          </a:solidFill>
-                          <a:latin typeface="Aptos"/>
-                        </a:rPr>
-                        <a:t>0.00</a:t>
-                      </a:r>
-                    </a:p>
-                  </a:txBody>
-                  <a:tcPr marL="45720" marR="45720" marT="0" marB="0" anchor="ctr">
-                    <a:lnL w="12700" cap="flat" cmpd="sng" algn="ctr">
-                      <a:solidFill>
-                        <a:srgbClr val="FFFFFF"/>
-                      </a:solidFill>
-                      <a:prstDash val="solid"/>
-                    </a:lnL>
-                    <a:lnR w="12700" cap="flat" cmpd="sng" algn="ctr">
-                      <a:solidFill>
-                        <a:srgbClr val="FFFFFF"/>
-                      </a:solidFill>
-                      <a:prstDash val="solid"/>
-                    </a:lnR>
-                    <a:lnT w="12700" cap="flat" cmpd="sng" algn="ctr">
-                      <a:solidFill>
-                        <a:srgbClr val="FFFFFF"/>
-                      </a:solidFill>
-                      <a:prstDash val="solid"/>
-                    </a:lnT>
-                    <a:lnB w="12700" cap="flat" cmpd="sng" algn="ctr">
-                      <a:solidFill>
-                        <a:srgbClr val="FFFFFF"/>
-                      </a:solidFill>
-                      <a:prstDash val="solid"/>
-                    </a:lnB>
-                    <a:solidFill>
-                      <a:srgbClr val="F8FAFC"/>
+                            <a:srgbClr val="C00000"/>
+                          </a:solidFill>
+                          <a:latin typeface="Aptos"/>
+                        </a:rPr>
+                        <a:t>(759,199.41)</a:t>
+                      </a:r>
+                    </a:p>
+                  </a:txBody>
+                  <a:tcPr marL="45720" marR="45720" marT="0" marB="0" anchor="ctr">
+                    <a:lnL w="12700" cap="flat" cmpd="sng" algn="ctr">
+                      <a:solidFill>
+                        <a:srgbClr val="FFFFFF"/>
+                      </a:solidFill>
+                      <a:prstDash val="solid"/>
+                    </a:lnL>
+                    <a:lnR w="12700" cap="flat" cmpd="sng" algn="ctr">
+                      <a:solidFill>
+                        <a:srgbClr val="FFFFFF"/>
+                      </a:solidFill>
+                      <a:prstDash val="solid"/>
+                    </a:lnR>
+                    <a:lnT w="12700" cap="flat" cmpd="sng" algn="ctr">
+                      <a:solidFill>
+                        <a:srgbClr val="FFFFFF"/>
+                      </a:solidFill>
+                      <a:prstDash val="solid"/>
+                    </a:lnT>
+                    <a:lnB w="12700" cap="flat" cmpd="sng" algn="ctr">
+                      <a:solidFill>
+                        <a:srgbClr val="FFFFFF"/>
+                      </a:solidFill>
+                      <a:prstDash val="solid"/>
+                    </a:lnB>
+                    <a:solidFill>
+                      <a:srgbClr val="FFC20E"/>
                     </a:solidFill>
                   </a:tcPr>
                 </a:tc>
@@ -24771,37 +24771,37 @@
                           </a:solidFill>
                           <a:latin typeface="Aptos"/>
                         </a:rPr>
-                        <a:t>0.00</a:t>
-                      </a:r>
-                    </a:p>
-                  </a:txBody>
-                  <a:tcPr marL="45720" marR="45720" marT="0" marB="0" anchor="ctr">
-                    <a:lnL w="12700" cap="flat" cmpd="sng" algn="ctr">
-                      <a:solidFill>
-                        <a:srgbClr val="FFFFFF"/>
-                      </a:solidFill>
-                      <a:prstDash val="solid"/>
-                    </a:lnL>
-                    <a:lnR w="12700" cap="flat" cmpd="sng" algn="ctr">
-                      <a:solidFill>
-                        <a:srgbClr val="FFFFFF"/>
-                      </a:solidFill>
-                      <a:prstDash val="solid"/>
-                    </a:lnR>
-                    <a:lnT w="12700" cap="flat" cmpd="sng" algn="ctr">
-                      <a:solidFill>
-                        <a:srgbClr val="FFFFFF"/>
-                      </a:solidFill>
-                      <a:prstDash val="solid"/>
-                    </a:lnT>
-                    <a:lnB w="12700" cap="flat" cmpd="sng" algn="ctr">
-                      <a:solidFill>
-                        <a:srgbClr val="FFFFFF"/>
-                      </a:solidFill>
-                      <a:prstDash val="solid"/>
-                    </a:lnB>
-                    <a:solidFill>
-                      <a:srgbClr val="FFFFFF"/>
+                        <a:t>74,626.92</a:t>
+                      </a:r>
+                    </a:p>
+                  </a:txBody>
+                  <a:tcPr marL="45720" marR="45720" marT="0" marB="0" anchor="ctr">
+                    <a:lnL w="12700" cap="flat" cmpd="sng" algn="ctr">
+                      <a:solidFill>
+                        <a:srgbClr val="FFFFFF"/>
+                      </a:solidFill>
+                      <a:prstDash val="solid"/>
+                    </a:lnL>
+                    <a:lnR w="12700" cap="flat" cmpd="sng" algn="ctr">
+                      <a:solidFill>
+                        <a:srgbClr val="FFFFFF"/>
+                      </a:solidFill>
+                      <a:prstDash val="solid"/>
+                    </a:lnR>
+                    <a:lnT w="12700" cap="flat" cmpd="sng" algn="ctr">
+                      <a:solidFill>
+                        <a:srgbClr val="FFFFFF"/>
+                      </a:solidFill>
+                      <a:prstDash val="solid"/>
+                    </a:lnT>
+                    <a:lnB w="12700" cap="flat" cmpd="sng" algn="ctr">
+                      <a:solidFill>
+                        <a:srgbClr val="FFFFFF"/>
+                      </a:solidFill>
+                      <a:prstDash val="solid"/>
+                    </a:lnB>
+                    <a:solidFill>
+                      <a:srgbClr val="FFC20E"/>
                     </a:solidFill>
                   </a:tcPr>
                 </a:tc>
@@ -24816,41 +24816,41 @@
                       <a:r>
                         <a:rPr b="1" sz="800">
                           <a:solidFill>
-                            <a:srgbClr val="0F172A"/>
-                          </a:solidFill>
-                          <a:latin typeface="Aptos"/>
-                        </a:rPr>
-                        <a:t>0.00</a:t>
-                      </a:r>
-                    </a:p>
-                  </a:txBody>
-                  <a:tcPr marL="45720" marR="45720" marT="0" marB="0" anchor="ctr">
-                    <a:lnL w="12700" cap="flat" cmpd="sng" algn="ctr">
-                      <a:solidFill>
-                        <a:srgbClr val="FFFFFF"/>
-                      </a:solidFill>
-                      <a:prstDash val="solid"/>
-                    </a:lnL>
-                    <a:lnR w="12700" cap="flat" cmpd="sng" algn="ctr">
-                      <a:solidFill>
-                        <a:srgbClr val="FFFFFF"/>
-                      </a:solidFill>
-                      <a:prstDash val="solid"/>
-                    </a:lnR>
-                    <a:lnT w="12700" cap="flat" cmpd="sng" algn="ctr">
-                      <a:solidFill>
-                        <a:srgbClr val="FFFFFF"/>
-                      </a:solidFill>
-                      <a:prstDash val="solid"/>
-                    </a:lnT>
-                    <a:lnB w="12700" cap="flat" cmpd="sng" algn="ctr">
-                      <a:solidFill>
-                        <a:srgbClr val="FFFFFF"/>
-                      </a:solidFill>
-                      <a:prstDash val="solid"/>
-                    </a:lnB>
-                    <a:solidFill>
-                      <a:srgbClr val="F8FAFC"/>
+                            <a:srgbClr val="C00000"/>
+                          </a:solidFill>
+                          <a:latin typeface="Aptos"/>
+                        </a:rPr>
+                        <a:t>(336,801.93)</a:t>
+                      </a:r>
+                    </a:p>
+                  </a:txBody>
+                  <a:tcPr marL="45720" marR="45720" marT="0" marB="0" anchor="ctr">
+                    <a:lnL w="12700" cap="flat" cmpd="sng" algn="ctr">
+                      <a:solidFill>
+                        <a:srgbClr val="FFFFFF"/>
+                      </a:solidFill>
+                      <a:prstDash val="solid"/>
+                    </a:lnL>
+                    <a:lnR w="12700" cap="flat" cmpd="sng" algn="ctr">
+                      <a:solidFill>
+                        <a:srgbClr val="FFFFFF"/>
+                      </a:solidFill>
+                      <a:prstDash val="solid"/>
+                    </a:lnR>
+                    <a:lnT w="12700" cap="flat" cmpd="sng" algn="ctr">
+                      <a:solidFill>
+                        <a:srgbClr val="FFFFFF"/>
+                      </a:solidFill>
+                      <a:prstDash val="solid"/>
+                    </a:lnT>
+                    <a:lnB w="12700" cap="flat" cmpd="sng" algn="ctr">
+                      <a:solidFill>
+                        <a:srgbClr val="FFFFFF"/>
+                      </a:solidFill>
+                      <a:prstDash val="solid"/>
+                    </a:lnB>
+                    <a:solidFill>
+                      <a:srgbClr val="FFC20E"/>
                     </a:solidFill>
                   </a:tcPr>
                 </a:tc>
@@ -24865,356 +24865,11 @@
                       <a:r>
                         <a:rPr b="1" sz="800">
                           <a:solidFill>
-                            <a:srgbClr val="0F172A"/>
-                          </a:solidFill>
-                          <a:latin typeface="Aptos"/>
-                        </a:rPr>
-                        <a:t>0.00</a:t>
-                      </a:r>
-                    </a:p>
-                  </a:txBody>
-                  <a:tcPr marL="45720" marR="45720" marT="0" marB="0" anchor="ctr">
-                    <a:lnL w="12700" cap="flat" cmpd="sng" algn="ctr">
-                      <a:solidFill>
-                        <a:srgbClr val="FFFFFF"/>
-                      </a:solidFill>
-                      <a:prstDash val="solid"/>
-                    </a:lnL>
-                    <a:lnR w="12700" cap="flat" cmpd="sng" algn="ctr">
-                      <a:solidFill>
-                        <a:srgbClr val="FFFFFF"/>
-                      </a:solidFill>
-                      <a:prstDash val="solid"/>
-                    </a:lnR>
-                    <a:lnT w="12700" cap="flat" cmpd="sng" algn="ctr">
-                      <a:solidFill>
-                        <a:srgbClr val="FFFFFF"/>
-                      </a:solidFill>
-                      <a:prstDash val="solid"/>
-                    </a:lnT>
-                    <a:lnB w="12700" cap="flat" cmpd="sng" algn="ctr">
-                      <a:solidFill>
-                        <a:srgbClr val="FFFFFF"/>
-                      </a:solidFill>
-                      <a:prstDash val="solid"/>
-                    </a:lnB>
-                    <a:solidFill>
-                      <a:srgbClr val="FFFFFF"/>
-                    </a:solidFill>
-                  </a:tcPr>
-                </a:tc>
-                <a:tc>
-                  <a:txBody>
-                    <a:bodyPr wrap="square"/>
-                    <a:lstStyle/>
-                    <a:p>
-                      <a:pPr algn="ctr">
-                        <a:defRPr sz="800"/>
-                      </a:pPr>
-                      <a:r>
-                        <a:rPr b="1" sz="800">
-                          <a:solidFill>
-                            <a:srgbClr val="0F172A"/>
-                          </a:solidFill>
-                          <a:latin typeface="Aptos"/>
-                        </a:rPr>
-                        <a:t>0.0%</a:t>
-                      </a:r>
-                    </a:p>
-                  </a:txBody>
-                  <a:tcPr marL="45720" marR="45720" marT="0" marB="0" anchor="ctr">
-                    <a:lnL w="12700" cap="flat" cmpd="sng" algn="ctr">
-                      <a:solidFill>
-                        <a:srgbClr val="FFFFFF"/>
-                      </a:solidFill>
-                      <a:prstDash val="solid"/>
-                    </a:lnL>
-                    <a:lnR w="12700" cap="flat" cmpd="sng" algn="ctr">
-                      <a:solidFill>
-                        <a:srgbClr val="FFFFFF"/>
-                      </a:solidFill>
-                      <a:prstDash val="solid"/>
-                    </a:lnR>
-                    <a:lnT w="12700" cap="flat" cmpd="sng" algn="ctr">
-                      <a:solidFill>
-                        <a:srgbClr val="FFFFFF"/>
-                      </a:solidFill>
-                      <a:prstDash val="solid"/>
-                    </a:lnT>
-                    <a:lnB w="12700" cap="flat" cmpd="sng" algn="ctr">
-                      <a:solidFill>
-                        <a:srgbClr val="FFFFFF"/>
-                      </a:solidFill>
-                      <a:prstDash val="solid"/>
-                    </a:lnB>
-                    <a:solidFill>
-                      <a:srgbClr val="DDF0F8"/>
-                    </a:solidFill>
-                  </a:tcPr>
-                </a:tc>
-                <a:tc>
-                  <a:txBody>
-                    <a:bodyPr wrap="square"/>
-                    <a:lstStyle/>
-                    <a:p>
-                      <a:pPr algn="l">
-                        <a:defRPr sz="800"/>
-                      </a:pPr>
-                      <a:r>
-                        <a:rPr b="1" sz="800">
-                          <a:solidFill>
-                            <a:srgbClr val="0F172A"/>
-                          </a:solidFill>
-                          <a:latin typeface="Aptos"/>
-                        </a:rPr>
-                        <a:t> </a:t>
-                      </a:r>
-                    </a:p>
-                  </a:txBody>
-                  <a:tcPr marL="45720" marR="45720" marT="0" marB="0" anchor="ctr">
-                    <a:lnL w="12700" cap="flat" cmpd="sng" algn="ctr">
-                      <a:solidFill>
-                        <a:srgbClr val="FFFFFF"/>
-                      </a:solidFill>
-                      <a:prstDash val="solid"/>
-                    </a:lnL>
-                    <a:lnR w="12700" cap="flat" cmpd="sng" algn="ctr">
-                      <a:solidFill>
-                        <a:srgbClr val="FFFFFF"/>
-                      </a:solidFill>
-                      <a:prstDash val="solid"/>
-                    </a:lnR>
-                    <a:lnT w="12700" cap="flat" cmpd="sng" algn="ctr">
-                      <a:solidFill>
-                        <a:srgbClr val="FFFFFF"/>
-                      </a:solidFill>
-                      <a:prstDash val="solid"/>
-                    </a:lnT>
-                    <a:lnB w="12700" cap="flat" cmpd="sng" algn="ctr">
-                      <a:solidFill>
-                        <a:srgbClr val="FFFFFF"/>
-                      </a:solidFill>
-                      <a:prstDash val="solid"/>
-                    </a:lnB>
-                    <a:solidFill>
-                      <a:srgbClr val="FFFFFF"/>
-                    </a:solidFill>
-                  </a:tcPr>
-                </a:tc>
-              </a:tr>
-              <a:tr h="182880">
-                <a:tc>
-                  <a:txBody>
-                    <a:bodyPr wrap="square"/>
-                    <a:lstStyle/>
-                    <a:p>
-                      <a:pPr algn="l">
-                        <a:defRPr sz="800"/>
-                      </a:pPr>
-                      <a:r>
-                        <a:rPr b="1" sz="800">
-                          <a:solidFill>
-                            <a:srgbClr val="FFFFFF"/>
-                          </a:solidFill>
-                          <a:latin typeface="Aptos"/>
-                        </a:rPr>
-                        <a:t>NET FINANCING ACTIVITIES</a:t>
-                      </a:r>
-                    </a:p>
-                  </a:txBody>
-                  <a:tcPr marL="45720" marR="45720" marT="0" marB="0" anchor="ctr">
-                    <a:lnL w="12700" cap="flat" cmpd="sng" algn="ctr">
-                      <a:solidFill>
-                        <a:srgbClr val="FFFFFF"/>
-                      </a:solidFill>
-                      <a:prstDash val="solid"/>
-                    </a:lnL>
-                    <a:lnR w="12700" cap="flat" cmpd="sng" algn="ctr">
-                      <a:solidFill>
-                        <a:srgbClr val="FFFFFF"/>
-                      </a:solidFill>
-                      <a:prstDash val="solid"/>
-                    </a:lnR>
-                    <a:lnT w="12700" cap="flat" cmpd="sng" algn="ctr">
-                      <a:solidFill>
-                        <a:srgbClr val="FFFFFF"/>
-                      </a:solidFill>
-                      <a:prstDash val="solid"/>
-                    </a:lnT>
-                    <a:lnB w="12700" cap="flat" cmpd="sng" algn="ctr">
-                      <a:solidFill>
-                        <a:srgbClr val="FFFFFF"/>
-                      </a:solidFill>
-                      <a:prstDash val="solid"/>
-                    </a:lnB>
-                    <a:solidFill>
-                      <a:srgbClr val="081E42"/>
-                    </a:solidFill>
-                  </a:tcPr>
-                </a:tc>
-                <a:tc>
-                  <a:txBody>
-                    <a:bodyPr wrap="square"/>
-                    <a:lstStyle/>
-                    <a:p>
-                      <a:pPr algn="r">
-                        <a:defRPr sz="800"/>
-                      </a:pPr>
-                      <a:r>
-                        <a:rPr b="1" sz="800">
-                          <a:solidFill>
                             <a:srgbClr val="C00000"/>
                           </a:solidFill>
                           <a:latin typeface="Aptos"/>
                         </a:rPr>
-                        <a:t>(759,199.41)</a:t>
-                      </a:r>
-                    </a:p>
-                  </a:txBody>
-                  <a:tcPr marL="45720" marR="45720" marT="0" marB="0" anchor="ctr">
-                    <a:lnL w="12700" cap="flat" cmpd="sng" algn="ctr">
-                      <a:solidFill>
-                        <a:srgbClr val="FFFFFF"/>
-                      </a:solidFill>
-                      <a:prstDash val="solid"/>
-                    </a:lnL>
-                    <a:lnR w="12700" cap="flat" cmpd="sng" algn="ctr">
-                      <a:solidFill>
-                        <a:srgbClr val="FFFFFF"/>
-                      </a:solidFill>
-                      <a:prstDash val="solid"/>
-                    </a:lnR>
-                    <a:lnT w="12700" cap="flat" cmpd="sng" algn="ctr">
-                      <a:solidFill>
-                        <a:srgbClr val="FFFFFF"/>
-                      </a:solidFill>
-                      <a:prstDash val="solid"/>
-                    </a:lnT>
-                    <a:lnB w="12700" cap="flat" cmpd="sng" algn="ctr">
-                      <a:solidFill>
-                        <a:srgbClr val="FFFFFF"/>
-                      </a:solidFill>
-                      <a:prstDash val="solid"/>
-                    </a:lnB>
-                    <a:solidFill>
-                      <a:srgbClr val="FFC20E"/>
-                    </a:solidFill>
-                  </a:tcPr>
-                </a:tc>
-                <a:tc>
-                  <a:txBody>
-                    <a:bodyPr wrap="square"/>
-                    <a:lstStyle/>
-                    <a:p>
-                      <a:pPr algn="r">
-                        <a:defRPr sz="800"/>
-                      </a:pPr>
-                      <a:r>
-                        <a:rPr b="1" sz="800">
-                          <a:solidFill>
-                            <a:srgbClr val="0F172A"/>
-                          </a:solidFill>
-                          <a:latin typeface="Aptos"/>
-                        </a:rPr>
-                        <a:t>74,626.92</a:t>
-                      </a:r>
-                    </a:p>
-                  </a:txBody>
-                  <a:tcPr marL="45720" marR="45720" marT="0" marB="0" anchor="ctr">
-                    <a:lnL w="12700" cap="flat" cmpd="sng" algn="ctr">
-                      <a:solidFill>
-                        <a:srgbClr val="FFFFFF"/>
-                      </a:solidFill>
-                      <a:prstDash val="solid"/>
-                    </a:lnL>
-                    <a:lnR w="12700" cap="flat" cmpd="sng" algn="ctr">
-                      <a:solidFill>
-                        <a:srgbClr val="FFFFFF"/>
-                      </a:solidFill>
-                      <a:prstDash val="solid"/>
-                    </a:lnR>
-                    <a:lnT w="12700" cap="flat" cmpd="sng" algn="ctr">
-                      <a:solidFill>
-                        <a:srgbClr val="FFFFFF"/>
-                      </a:solidFill>
-                      <a:prstDash val="solid"/>
-                    </a:lnT>
-                    <a:lnB w="12700" cap="flat" cmpd="sng" algn="ctr">
-                      <a:solidFill>
-                        <a:srgbClr val="FFFFFF"/>
-                      </a:solidFill>
-                      <a:prstDash val="solid"/>
-                    </a:lnB>
-                    <a:solidFill>
-                      <a:srgbClr val="FFC20E"/>
-                    </a:solidFill>
-                  </a:tcPr>
-                </a:tc>
-                <a:tc>
-                  <a:txBody>
-                    <a:bodyPr wrap="square"/>
-                    <a:lstStyle/>
-                    <a:p>
-                      <a:pPr algn="r">
-                        <a:defRPr sz="800"/>
-                      </a:pPr>
-                      <a:r>
-                        <a:rPr b="1" sz="800">
-                          <a:solidFill>
-                            <a:srgbClr val="C00000"/>
-                          </a:solidFill>
-                          <a:latin typeface="Aptos"/>
-                        </a:rPr>
-                        <a:t>(107,801.93)</a:t>
-                      </a:r>
-                    </a:p>
-                  </a:txBody>
-                  <a:tcPr marL="45720" marR="45720" marT="0" marB="0" anchor="ctr">
-                    <a:lnL w="12700" cap="flat" cmpd="sng" algn="ctr">
-                      <a:solidFill>
-                        <a:srgbClr val="FFFFFF"/>
-                      </a:solidFill>
-                      <a:prstDash val="solid"/>
-                    </a:lnL>
-                    <a:lnR w="12700" cap="flat" cmpd="sng" algn="ctr">
-                      <a:solidFill>
-                        <a:srgbClr val="FFFFFF"/>
-                      </a:solidFill>
-                      <a:prstDash val="solid"/>
-                    </a:lnR>
-                    <a:lnT w="12700" cap="flat" cmpd="sng" algn="ctr">
-                      <a:solidFill>
-                        <a:srgbClr val="FFFFFF"/>
-                      </a:solidFill>
-                      <a:prstDash val="solid"/>
-                    </a:lnT>
-                    <a:lnB w="12700" cap="flat" cmpd="sng" algn="ctr">
-                      <a:solidFill>
-                        <a:srgbClr val="FFFFFF"/>
-                      </a:solidFill>
-                      <a:prstDash val="solid"/>
-                    </a:lnB>
-                    <a:solidFill>
-                      <a:srgbClr val="FFC20E"/>
-                    </a:solidFill>
-                  </a:tcPr>
-                </a:tc>
-                <a:tc>
-                  <a:txBody>
-                    <a:bodyPr wrap="square"/>
-                    <a:lstStyle/>
-                    <a:p>
-                      <a:pPr algn="r">
-                        <a:defRPr sz="800"/>
-                      </a:pPr>
-                      <a:r>
-                        <a:rPr b="1" sz="800">
-                          <a:solidFill>
-                            <a:srgbClr val="C00000"/>
-                          </a:solidFill>
-                          <a:latin typeface="Aptos"/>
-                        </a:rPr>
-                        <a:t>(792,374.42)</a:t>
+                        <a:t>(1,021,374.42)</a:t>
                       </a:r>
                     </a:p>
                   </a:txBody>

--- a/q3-finance-report/Q3_2026_Finance_Report.pptx
+++ b/q3-finance-report/Q3_2026_Finance_Report.pptx
@@ -3295,7 +3295,7 @@
                 </a:solidFill>
                 <a:latin typeface="Aptos"/>
               </a:rPr>
-              <a:t>Q3 operating cash was positive overall at RM2.47M, but negative in July after a RM1.03M SST payment. Net cash flow was (RM2.88M), mainly from RM3.34M new-branch capex and a RM2.00M fixed deposit placement.</a:t>
+              <a:t>Q3 operating cash was positive every month, totalling RM2.61M. Net cash flow was (RM2.88M), mainly from RM3.34M new-branch capex and RM2.29M placed in fixed deposit and investment.</a:t>
             </a:r>
           </a:p>
         </p:txBody>
@@ -3330,7 +3330,7 @@
                 </a:solidFill>
                 <a:latin typeface="Aptos"/>
               </a:rPr>
-              <a:t>Source: TGFB Cash Flow Statement PDFs for July, August and September 2026 (September revised upload). Sep RM229K investor fund reclassified from financing to investing, consistent with Jul and Q2.</a:t>
+              <a:t>Source: TGFB Cash Flow Statement PDFs for July, August and September 2026 (latest revised upload)</a:t>
             </a:r>
           </a:p>
         </p:txBody>
@@ -3625,7 +3625,7 @@
                 </a:solidFill>
                 <a:latin typeface="Aptos"/>
               </a:rPr>
-              <a:t>RM26.67M</a:t>
+              <a:t>RM26.53M</a:t>
             </a:r>
           </a:p>
         </p:txBody>
@@ -3790,7 +3790,7 @@
                 </a:solidFill>
                 <a:latin typeface="Aptos"/>
               </a:rPr>
-              <a:t>RM2.47M</a:t>
+              <a:t>RM2.61M</a:t>
             </a:r>
           </a:p>
         </p:txBody>
@@ -3825,7 +3825,7 @@
                 </a:solidFill>
                 <a:latin typeface="Aptos"/>
               </a:rPr>
-              <a:t>Negative in Jul; positive Aug-Sep</a:t>
+              <a:t>Positive across Jul-Aug-Sep</a:t>
             </a:r>
           </a:p>
         </p:txBody>
@@ -4907,7 +4907,7 @@
                           </a:solidFill>
                           <a:latin typeface="Aptos"/>
                         </a:rPr>
-                        <a:t>9,286,898.37</a:t>
+                        <a:t>9,182,345.05</a:t>
                       </a:r>
                     </a:p>
                   </a:txBody>
@@ -4956,7 +4956,7 @@
                           </a:solidFill>
                           <a:latin typeface="Aptos"/>
                         </a:rPr>
-                        <a:t>8,299,537.45</a:t>
+                        <a:t>8,279,946.95</a:t>
                       </a:r>
                     </a:p>
                   </a:txBody>
@@ -5005,7 +5005,7 @@
                           </a:solidFill>
                           <a:latin typeface="Aptos"/>
                         </a:rPr>
-                        <a:t>9,086,606.48</a:t>
+                        <a:t>9,070,707.48</a:t>
                       </a:r>
                     </a:p>
                   </a:txBody>
@@ -5054,7 +5054,7 @@
                           </a:solidFill>
                           <a:latin typeface="Aptos"/>
                         </a:rPr>
-                        <a:t>26,673,042.30</a:t>
+                        <a:t>26,532,999.48</a:t>
                       </a:r>
                     </a:p>
                   </a:txBody>
@@ -5199,11 +5199,11 @@
                       <a:r>
                         <a:rPr b="1" sz="1000">
                           <a:solidFill>
-                            <a:srgbClr val="C00000"/>
-                          </a:solidFill>
-                          <a:latin typeface="Aptos"/>
-                        </a:rPr>
-                        <a:t>(59,499.21)</a:t>
+                            <a:srgbClr val="0F172A"/>
+                          </a:solidFill>
+                          <a:latin typeface="Aptos"/>
+                        </a:rPr>
+                        <a:t>45,054.11</a:t>
                       </a:r>
                     </a:p>
                   </a:txBody>
@@ -5252,7 +5252,7 @@
                           </a:solidFill>
                           <a:latin typeface="Aptos"/>
                         </a:rPr>
-                        <a:t>1,500,013.11</a:t>
+                        <a:t>1,519,603.61</a:t>
                       </a:r>
                     </a:p>
                   </a:txBody>
@@ -5301,7 +5301,7 @@
                           </a:solidFill>
                           <a:latin typeface="Aptos"/>
                         </a:rPr>
-                        <a:t>1,033,010.69</a:t>
+                        <a:t>1,048,909.69</a:t>
                       </a:r>
                     </a:p>
                   </a:txBody>
@@ -5350,7 +5350,7 @@
                           </a:solidFill>
                           <a:latin typeface="Aptos"/>
                         </a:rPr>
-                        <a:t>2,473,524.59</a:t>
+                        <a:t>2,613,567.41</a:t>
                       </a:r>
                     </a:p>
                   </a:txBody>
@@ -5399,7 +5399,7 @@
                           </a:solidFill>
                           <a:latin typeface="Aptos"/>
                         </a:rPr>
-                        <a:t>Negative in Jul; Aug strongest at RM1.50M</a:t>
+                        <a:t>Positive every month; Aug strongest at RM1.52M</a:t>
                       </a:r>
                     </a:p>
                   </a:txBody>
@@ -5499,7 +5499,7 @@
                           </a:solidFill>
                           <a:latin typeface="Aptos"/>
                         </a:rPr>
-                        <a:t>(1,490,846.36)</a:t>
+                        <a:t>(2,497,139.36)</a:t>
                       </a:r>
                     </a:p>
                   </a:txBody>
@@ -5597,7 +5597,7 @@
                           </a:solidFill>
                           <a:latin typeface="Aptos"/>
                         </a:rPr>
-                        <a:t>(2,416,279.73)</a:t>
+                        <a:t>(2,645,279.73)</a:t>
                       </a:r>
                     </a:p>
                   </a:txBody>
@@ -5646,7 +5646,7 @@
                           </a:solidFill>
                           <a:latin typeface="Aptos"/>
                         </a:rPr>
-                        <a:t>(4,327,453.78)</a:t>
+                        <a:t>(5,562,746.78)</a:t>
                       </a:r>
                     </a:p>
                   </a:txBody>
@@ -5695,7 +5695,7 @@
                           </a:solidFill>
                           <a:latin typeface="Aptos"/>
                         </a:rPr>
-                        <a:t>Jul capex RM2.30M; Sep includes RM2.00M fixed deposit placement</a:t>
+                        <a:t>Jul capex RM2.30M; Sep RM2.00M fixed deposit placement</a:t>
                       </a:r>
                     </a:p>
                   </a:txBody>
@@ -5791,11 +5791,11 @@
                       <a:r>
                         <a:rPr b="1" sz="1000">
                           <a:solidFill>
-                            <a:srgbClr val="C00000"/>
-                          </a:solidFill>
-                          <a:latin typeface="Aptos"/>
-                        </a:rPr>
-                        <a:t>(759,199.41)</a:t>
+                            <a:srgbClr val="0F172A"/>
+                          </a:solidFill>
+                          <a:latin typeface="Aptos"/>
+                        </a:rPr>
+                        <a:t>142,540.27</a:t>
                       </a:r>
                     </a:p>
                   </a:txBody>
@@ -5844,7 +5844,7 @@
                           </a:solidFill>
                           <a:latin typeface="Aptos"/>
                         </a:rPr>
-                        <a:t>74,626.92</a:t>
+                        <a:t>55,036.42</a:t>
                       </a:r>
                     </a:p>
                   </a:txBody>
@@ -5893,7 +5893,7 @@
                           </a:solidFill>
                           <a:latin typeface="Aptos"/>
                         </a:rPr>
-                        <a:t>(336,801.93)</a:t>
+                        <a:t>(123,700.93)</a:t>
                       </a:r>
                     </a:p>
                   </a:txBody>
@@ -5938,11 +5938,11 @@
                       <a:r>
                         <a:rPr b="1" sz="1000">
                           <a:solidFill>
-                            <a:srgbClr val="C00000"/>
-                          </a:solidFill>
-                          <a:latin typeface="Aptos"/>
-                        </a:rPr>
-                        <a:t>(1,021,374.42)</a:t>
+                            <a:srgbClr val="0F172A"/>
+                          </a:solidFill>
+                          <a:latin typeface="Aptos"/>
+                        </a:rPr>
+                        <a:t>73,875.76</a:t>
                       </a:r>
                     </a:p>
                   </a:txBody>
@@ -5991,7 +5991,7 @@
                           </a:solidFill>
                           <a:latin typeface="Aptos"/>
                         </a:rPr>
-                        <a:t>Aug positive from RM230.3K repayment from related parties</a:t>
+                        <a:t>Jul includes RM720K investor funds; Sep net outflow</a:t>
                       </a:r>
                     </a:p>
                   </a:txBody>
@@ -6396,7 +6396,7 @@
                 </a:solidFill>
                 <a:latin typeface="Aptos"/>
               </a:rPr>
-              <a:t>Cash receipts grew every month from RM9.23M to RM10.12M, but SST payments in July and September (RM2.18M combined) and new-branch capex of RM3.34M pulled cash down. RM2.00M of the decline was placed in fixed deposit, not spent.</a:t>
+              <a:t>Cash receipts grew every month from RM9.23M to RM10.12M, but SST payments in July and September (RM2.18M combined) and new-branch capex of RM3.34M pulled cash down. RM2.29M went into fixed deposit and investment, not spent.</a:t>
             </a:r>
           </a:p>
         </p:txBody>
@@ -6658,7 +6658,7 @@
                 </a:solidFill>
                 <a:latin typeface="Aptos"/>
               </a:rPr>
-              <a:t>Source: TGFB Cash Flow Statement PDFs for July, August and September 2026 (September revised upload). Sep RM229K investor fund reclassified from financing to investing, consistent with Jul and Q2.</a:t>
+              <a:t>Source: TGFB Cash Flow Statement PDFs for July, August and September 2026 (latest revised upload)</a:t>
             </a:r>
           </a:p>
         </p:txBody>
@@ -9199,7 +9199,7 @@
                 </a:solidFill>
                 <a:latin typeface="Aptos"/>
               </a:rPr>
-              <a:t>Source: TGFB Cash Flow Statement PDFs for July, August and September 2026 (September revised upload). Sep RM229K investor fund reclassified from financing to investing, consistent with Jul and Q2.</a:t>
+              <a:t>Source: TGFB Cash Flow Statement PDFs for July, August and September 2026 (latest revised upload)</a:t>
             </a:r>
           </a:p>
         </p:txBody>
@@ -9901,7 +9901,7 @@
                           </a:solidFill>
                           <a:latin typeface="Aptos"/>
                         </a:rPr>
-                        <a:t>53.0%</a:t>
+                        <a:t>53.3%</a:t>
                       </a:r>
                     </a:p>
                   </a:txBody>
@@ -10740,7 +10740,7 @@
                           </a:solidFill>
                           <a:latin typeface="Aptos"/>
                         </a:rPr>
-                        <a:t>135,657.60</a:t>
+                        <a:t>139,925.45</a:t>
                       </a:r>
                     </a:p>
                   </a:txBody>
@@ -10887,7 +10887,7 @@
                           </a:solidFill>
                           <a:latin typeface="Aptos"/>
                         </a:rPr>
-                        <a:t>631,986.05</a:t>
+                        <a:t>636,253.90</a:t>
                       </a:r>
                     </a:p>
                   </a:txBody>
@@ -11085,7 +11085,7 @@
                           </a:solidFill>
                           <a:latin typeface="Aptos"/>
                         </a:rPr>
-                        <a:t>7,678.23</a:t>
+                        <a:t>10,638.63</a:t>
                       </a:r>
                     </a:p>
                   </a:txBody>
@@ -11134,7 +11134,7 @@
                           </a:solidFill>
                           <a:latin typeface="Aptos"/>
                         </a:rPr>
-                        <a:t>30,473.45</a:t>
+                        <a:t>33,472.90</a:t>
                       </a:r>
                     </a:p>
                   </a:txBody>
@@ -11232,7 +11232,7 @@
                           </a:solidFill>
                           <a:latin typeface="Aptos"/>
                         </a:rPr>
-                        <a:t>45,097.53</a:t>
+                        <a:t>51,057.38</a:t>
                       </a:r>
                     </a:p>
                   </a:txBody>
@@ -11775,7 +11775,7 @@
                           </a:solidFill>
                           <a:latin typeface="Aptos"/>
                         </a:rPr>
-                        <a:t>1,825,325.86</a:t>
+                        <a:t>1,715,948.15</a:t>
                       </a:r>
                     </a:p>
                   </a:txBody>
@@ -11824,7 +11824,7 @@
                           </a:solidFill>
                           <a:latin typeface="Aptos"/>
                         </a:rPr>
-                        <a:t>1,785,806.92</a:t>
+                        <a:t>1,766,216.42</a:t>
                       </a:r>
                     </a:p>
                   </a:txBody>
@@ -11873,7 +11873,7 @@
                           </a:solidFill>
                           <a:latin typeface="Aptos"/>
                         </a:rPr>
-                        <a:t>1,776,058.92</a:t>
+                        <a:t>1,760,159.92</a:t>
                       </a:r>
                     </a:p>
                   </a:txBody>
@@ -11922,7 +11922,7 @@
                           </a:solidFill>
                           <a:latin typeface="Aptos"/>
                         </a:rPr>
-                        <a:t>5,387,191.70</a:t>
+                        <a:t>5,242,324.49</a:t>
                       </a:r>
                     </a:p>
                   </a:txBody>
@@ -11971,7 +11971,7 @@
                           </a:solidFill>
                           <a:latin typeface="Aptos"/>
                         </a:rPr>
-                        <a:t>20.2%</a:t>
+                        <a:t>19.8%</a:t>
                       </a:r>
                     </a:p>
                   </a:txBody>
@@ -12020,7 +12020,7 @@
                           </a:solidFill>
                           <a:latin typeface="Aptos"/>
                         </a:rPr>
-                        <a:t>Stable at RM1.78M-RM1.83M monthly</a:t>
+                        <a:t>Stable at RM1.72M-RM1.77M monthly</a:t>
                       </a:r>
                     </a:p>
                   </a:txBody>
@@ -12810,7 +12810,7 @@
                           </a:solidFill>
                           <a:latin typeface="Aptos"/>
                         </a:rPr>
-                        <a:t>122,119.51</a:t>
+                        <a:t>119,159.11</a:t>
                       </a:r>
                     </a:p>
                   </a:txBody>
@@ -12859,7 +12859,7 @@
                           </a:solidFill>
                           <a:latin typeface="Aptos"/>
                         </a:rPr>
-                        <a:t>52,573.09</a:t>
+                        <a:t>49,573.64</a:t>
                       </a:r>
                     </a:p>
                   </a:txBody>
@@ -12957,7 +12957,7 @@
                           </a:solidFill>
                           <a:latin typeface="Aptos"/>
                         </a:rPr>
-                        <a:t>189,920.60</a:t>
+                        <a:t>183,960.75</a:t>
                       </a:r>
                     </a:p>
                   </a:txBody>
@@ -13155,7 +13155,7 @@
                           </a:solidFill>
                           <a:latin typeface="Aptos"/>
                         </a:rPr>
-                        <a:t>148,830.60</a:t>
+                        <a:t>148,787.27</a:t>
                       </a:r>
                     </a:p>
                   </a:txBody>
@@ -13302,7 +13302,7 @@
                           </a:solidFill>
                           <a:latin typeface="Aptos"/>
                         </a:rPr>
-                        <a:t>458,368.55</a:t>
+                        <a:t>458,325.22</a:t>
                       </a:r>
                     </a:p>
                   </a:txBody>
@@ -14880,7 +14880,7 @@
                           </a:solidFill>
                           <a:latin typeface="Aptos"/>
                         </a:rPr>
-                        <a:t>1,900.13</a:t>
+                        <a:t>2,500.00</a:t>
                       </a:r>
                     </a:p>
                   </a:txBody>
@@ -15027,7 +15027,7 @@
                           </a:solidFill>
                           <a:latin typeface="Aptos"/>
                         </a:rPr>
-                        <a:t>1,900.13</a:t>
+                        <a:t>2,500.00</a:t>
                       </a:r>
                     </a:p>
                   </a:txBody>
@@ -15570,7 +15570,7 @@
                           </a:solidFill>
                           <a:latin typeface="Aptos"/>
                         </a:rPr>
-                        <a:t>9,286,898.37</a:t>
+                        <a:t>9,182,345.05</a:t>
                       </a:r>
                     </a:p>
                   </a:txBody>
@@ -15619,7 +15619,7 @@
                           </a:solidFill>
                           <a:latin typeface="Aptos"/>
                         </a:rPr>
-                        <a:t>8,299,537.45</a:t>
+                        <a:t>8,279,946.95</a:t>
                       </a:r>
                     </a:p>
                   </a:txBody>
@@ -15668,7 +15668,7 @@
                           </a:solidFill>
                           <a:latin typeface="Aptos"/>
                         </a:rPr>
-                        <a:t>9,086,606.48</a:t>
+                        <a:t>9,070,707.48</a:t>
                       </a:r>
                     </a:p>
                   </a:txBody>
@@ -15717,7 +15717,7 @@
                           </a:solidFill>
                           <a:latin typeface="Aptos"/>
                         </a:rPr>
-                        <a:t>26,673,042.30</a:t>
+                        <a:t>26,532,999.48</a:t>
                       </a:r>
                     </a:p>
                   </a:txBody>
@@ -15924,7 +15924,7 @@
                 </a:solidFill>
                 <a:latin typeface="Aptos"/>
               </a:rPr>
-              <a:t>TOP OUTFLOW CATEGORIES: Inventory purchases RM14.14M | Wage expenses RM5.39M | SST RM2.18M | Rental RM1.31M | Income taxes RM0.75M</a:t>
+              <a:t>TOP OUTFLOW CATEGORIES: Inventory purchases RM14.14M | Wage expenses RM5.24M | SST RM2.18M | Rental RM1.31M | Income taxes RM0.75M</a:t>
             </a:r>
           </a:p>
         </p:txBody>
@@ -16151,7 +16151,7 @@
                 </a:solidFill>
                 <a:latin typeface="Aptos"/>
               </a:rPr>
-              <a:t>New-branch capex (RM3.34M) and a RM2.00M fixed deposit placement in September drove investing outflows. Financing was positive only in August, from related-party repayments.</a:t>
+              <a:t>New-branch capex (RM3.34M) and RM2.29M placed in fixed deposits drove investing outflows. Financing was positive in Jul-Aug, helped by RM949K investor funds.</a:t>
             </a:r>
           </a:p>
         </p:txBody>
@@ -16186,7 +16186,7 @@
                 </a:solidFill>
                 <a:latin typeface="Aptos"/>
               </a:rPr>
-              <a:t>Source: TGFB Cash Flow Statement PDFs for July, August and September 2026 (September revised upload). Sep RM229K investor fund reclassified from financing to investing, consistent with Jul and Q2.</a:t>
+              <a:t>Source: TGFB Cash Flow Statement PDFs for July, August and September 2026 (latest revised upload)</a:t>
             </a:r>
           </a:p>
         </p:txBody>
@@ -16274,13 +16274,13 @@
                 <a:tableStyleId>{2D5ABB26-0587-4C30-8999-92F81FD0307C}</a:tableStyleId>
               </a:tblPr>
               <a:tblGrid>
-                <a:gridCol w="2743200"/>
-                <a:gridCol w="1234440"/>
-                <a:gridCol w="1234440"/>
-                <a:gridCol w="1234440"/>
-                <a:gridCol w="1325880"/>
+                <a:gridCol w="2331720"/>
+                <a:gridCol w="1188720"/>
+                <a:gridCol w="1188720"/>
+                <a:gridCol w="1188720"/>
+                <a:gridCol w="1280160"/>
                 <a:gridCol w="685800"/>
-                <a:gridCol w="3218688"/>
+                <a:gridCol w="3813048"/>
               </a:tblGrid>
               <a:tr h="274320">
                 <a:tc>
@@ -16888,7 +16888,7 @@
                           </a:solidFill>
                           <a:latin typeface="Aptos"/>
                         </a:rPr>
-                        <a:t>2.9%</a:t>
+                        <a:t>3.2%</a:t>
                       </a:r>
                     </a:p>
                   </a:txBody>
@@ -17233,7 +17233,7 @@
                           </a:solidFill>
                           <a:latin typeface="Aptos"/>
                         </a:rPr>
-                        <a:t>0.1%</a:t>
+                        <a:t>0.2%</a:t>
                       </a:r>
                     </a:p>
                   </a:txBody>
@@ -17333,7 +17333,7 @@
                           </a:solidFill>
                           <a:latin typeface="Aptos"/>
                         </a:rPr>
-                        <a:t>Collection of Investor funds</a:t>
+                        <a:t>Purchase of property and equipment</a:t>
                       </a:r>
                     </a:p>
                   </a:txBody>
@@ -17378,11 +17378,11 @@
                       <a:r>
                         <a:rPr b="1" sz="950">
                           <a:solidFill>
-                            <a:srgbClr val="0F172A"/>
-                          </a:solidFill>
-                          <a:latin typeface="Aptos"/>
-                        </a:rPr>
-                        <a:t>720,000.00</a:t>
+                            <a:srgbClr val="C00000"/>
+                          </a:solidFill>
+                          <a:latin typeface="Aptos"/>
+                        </a:rPr>
+                        <a:t>(100,223.00)</a:t>
                       </a:r>
                     </a:p>
                   </a:txBody>
@@ -17427,11 +17427,11 @@
                       <a:r>
                         <a:rPr b="1" sz="950">
                           <a:solidFill>
-                            <a:srgbClr val="0F172A"/>
-                          </a:solidFill>
-                          <a:latin typeface="Aptos"/>
-                        </a:rPr>
-                        <a:t>0.00</a:t>
+                            <a:srgbClr val="C00000"/>
+                          </a:solidFill>
+                          <a:latin typeface="Aptos"/>
+                        </a:rPr>
+                        <a:t>(17,369.00)</a:t>
                       </a:r>
                     </a:p>
                   </a:txBody>
@@ -17476,11 +17476,11 @@
                       <a:r>
                         <a:rPr b="1" sz="950">
                           <a:solidFill>
-                            <a:srgbClr val="0F172A"/>
-                          </a:solidFill>
-                          <a:latin typeface="Aptos"/>
-                        </a:rPr>
-                        <a:t>229,000.00</a:t>
+                            <a:srgbClr val="C00000"/>
+                          </a:solidFill>
+                          <a:latin typeface="Aptos"/>
+                        </a:rPr>
+                        <a:t>(14,400.00)</a:t>
                       </a:r>
                     </a:p>
                   </a:txBody>
@@ -17525,11 +17525,11 @@
                       <a:r>
                         <a:rPr b="1" sz="950">
                           <a:solidFill>
-                            <a:srgbClr val="0F172A"/>
-                          </a:solidFill>
-                          <a:latin typeface="Aptos"/>
-                        </a:rPr>
-                        <a:t>949,000.00</a:t>
+                            <a:srgbClr val="C00000"/>
+                          </a:solidFill>
+                          <a:latin typeface="Aptos"/>
+                        </a:rPr>
+                        <a:t>(131,992.00)</a:t>
                       </a:r>
                     </a:p>
                   </a:txBody>
@@ -17578,7 +17578,7 @@
                           </a:solidFill>
                           <a:latin typeface="Aptos"/>
                         </a:rPr>
-                        <a:t>14.3%</a:t>
+                        <a:t>2.2%</a:t>
                       </a:r>
                     </a:p>
                   </a:txBody>
@@ -17627,7 +17627,7 @@
                           </a:solidFill>
                           <a:latin typeface="Aptos"/>
                         </a:rPr>
-                        <a:t>Investor fund; Sep reclassified from financing</a:t>
+                        <a:t>Jul truck &amp; phone; reduced every month</a:t>
                       </a:r>
                     </a:p>
                   </a:txBody>
@@ -17678,7 +17678,7 @@
                           </a:solidFill>
                           <a:latin typeface="Aptos"/>
                         </a:rPr>
-                        <a:t>Purchase of property and equipment</a:t>
+                        <a:t>Capex New Branches</a:t>
                       </a:r>
                     </a:p>
                   </a:txBody>
@@ -17727,7 +17727,7 @@
                           </a:solidFill>
                           <a:latin typeface="Aptos"/>
                         </a:rPr>
-                        <a:t>(100,223.00)</a:t>
+                        <a:t>(2,300,748.36)</a:t>
                       </a:r>
                     </a:p>
                   </a:txBody>
@@ -17776,7 +17776,7 @@
                           </a:solidFill>
                           <a:latin typeface="Aptos"/>
                         </a:rPr>
-                        <a:t>(17,369.00)</a:t>
+                        <a:t>(402,958.69)</a:t>
                       </a:r>
                     </a:p>
                   </a:txBody>
@@ -17825,7 +17825,7 @@
                           </a:solidFill>
                           <a:latin typeface="Aptos"/>
                         </a:rPr>
-                        <a:t>(14,400.00)</a:t>
+                        <a:t>(639,849.95)</a:t>
                       </a:r>
                     </a:p>
                   </a:txBody>
@@ -17874,7 +17874,7 @@
                           </a:solidFill>
                           <a:latin typeface="Aptos"/>
                         </a:rPr>
-                        <a:t>(131,992.00)</a:t>
+                        <a:t>(3,343,557.00)</a:t>
                       </a:r>
                     </a:p>
                   </a:txBody>
@@ -17923,7 +17923,7 @@
                           </a:solidFill>
                           <a:latin typeface="Aptos"/>
                         </a:rPr>
-                        <a:t>2.0%</a:t>
+                        <a:t>56.1%</a:t>
                       </a:r>
                     </a:p>
                   </a:txBody>
@@ -17972,7 +17972,7 @@
                           </a:solidFill>
                           <a:latin typeface="Aptos"/>
                         </a:rPr>
-                        <a:t>Reduced every month</a:t>
+                        <a:t>For outlet expansion; Jul-26 highest</a:t>
                       </a:r>
                     </a:p>
                   </a:txBody>
@@ -18023,7 +18023,7 @@
                           </a:solidFill>
                           <a:latin typeface="Aptos"/>
                         </a:rPr>
-                        <a:t>Capex New Branches</a:t>
+                        <a:t>Placement of Fixed Deposit</a:t>
                       </a:r>
                     </a:p>
                   </a:txBody>
@@ -18068,11 +18068,11 @@
                       <a:r>
                         <a:rPr b="1" sz="950">
                           <a:solidFill>
-                            <a:srgbClr val="C00000"/>
-                          </a:solidFill>
-                          <a:latin typeface="Aptos"/>
-                        </a:rPr>
-                        <a:t>(2,300,748.36)</a:t>
+                            <a:srgbClr val="0F172A"/>
+                          </a:solidFill>
+                          <a:latin typeface="Aptos"/>
+                        </a:rPr>
+                        <a:t>0.00</a:t>
                       </a:r>
                     </a:p>
                   </a:txBody>
@@ -18117,11 +18117,11 @@
                       <a:r>
                         <a:rPr b="1" sz="950">
                           <a:solidFill>
-                            <a:srgbClr val="C00000"/>
-                          </a:solidFill>
-                          <a:latin typeface="Aptos"/>
-                        </a:rPr>
-                        <a:t>(402,958.69)</a:t>
+                            <a:srgbClr val="0F172A"/>
+                          </a:solidFill>
+                          <a:latin typeface="Aptos"/>
+                        </a:rPr>
+                        <a:t>0.00</a:t>
                       </a:r>
                     </a:p>
                   </a:txBody>
@@ -18170,7 +18170,7 @@
                           </a:solidFill>
                           <a:latin typeface="Aptos"/>
                         </a:rPr>
-                        <a:t>(639,849.95)</a:t>
+                        <a:t>(2,000,000.00)</a:t>
                       </a:r>
                     </a:p>
                   </a:txBody>
@@ -18219,7 +18219,7 @@
                           </a:solidFill>
                           <a:latin typeface="Aptos"/>
                         </a:rPr>
-                        <a:t>(3,343,557.00)</a:t>
+                        <a:t>(2,000,000.00)</a:t>
                       </a:r>
                     </a:p>
                   </a:txBody>
@@ -18268,7 +18268,7 @@
                           </a:solidFill>
                           <a:latin typeface="Aptos"/>
                         </a:rPr>
-                        <a:t>50.5%</a:t>
+                        <a:t>33.6%</a:t>
                       </a:r>
                     </a:p>
                   </a:txBody>
@@ -18317,7 +18317,7 @@
                           </a:solidFill>
                           <a:latin typeface="Aptos"/>
                         </a:rPr>
-                        <a:t>For outlet expansion; Jul-26 highest</a:t>
+                        <a:t>RM2.0M placed in fixed deposit in Sep</a:t>
                       </a:r>
                     </a:p>
                   </a:txBody>
@@ -18368,7 +18368,7 @@
                           </a:solidFill>
                           <a:latin typeface="Aptos"/>
                         </a:rPr>
-                        <a:t>Placement of Fixed Deposit</a:t>
+                        <a:t>Purchase of investment</a:t>
                       </a:r>
                     </a:p>
                   </a:txBody>
@@ -18413,11 +18413,11 @@
                       <a:r>
                         <a:rPr b="1" sz="950">
                           <a:solidFill>
-                            <a:srgbClr val="0F172A"/>
-                          </a:solidFill>
-                          <a:latin typeface="Aptos"/>
-                        </a:rPr>
-                        <a:t>0.00</a:t>
+                            <a:srgbClr val="C00000"/>
+                          </a:solidFill>
+                          <a:latin typeface="Aptos"/>
+                        </a:rPr>
+                        <a:t>(286,293.00)</a:t>
                       </a:r>
                     </a:p>
                   </a:txBody>
@@ -18511,11 +18511,11 @@
                       <a:r>
                         <a:rPr b="1" sz="950">
                           <a:solidFill>
-                            <a:srgbClr val="C00000"/>
-                          </a:solidFill>
-                          <a:latin typeface="Aptos"/>
-                        </a:rPr>
-                        <a:t>(2,000,000.00)</a:t>
+                            <a:srgbClr val="0F172A"/>
+                          </a:solidFill>
+                          <a:latin typeface="Aptos"/>
+                        </a:rPr>
+                        <a:t>0.00</a:t>
                       </a:r>
                     </a:p>
                   </a:txBody>
@@ -18564,7 +18564,7 @@
                           </a:solidFill>
                           <a:latin typeface="Aptos"/>
                         </a:rPr>
-                        <a:t>(2,000,000.00)</a:t>
+                        <a:t>(286,293.00)</a:t>
                       </a:r>
                     </a:p>
                   </a:txBody>
@@ -18613,7 +18613,7 @@
                           </a:solidFill>
                           <a:latin typeface="Aptos"/>
                         </a:rPr>
-                        <a:t>30.2%</a:t>
+                        <a:t>4.8%</a:t>
                       </a:r>
                     </a:p>
                   </a:txBody>
@@ -18662,7 +18662,7 @@
                           </a:solidFill>
                           <a:latin typeface="Aptos"/>
                         </a:rPr>
-                        <a:t>RM2.0M placed in fixed deposit in Sep</a:t>
+                        <a:t>Jul fixed deposit (per accounts remark)</a:t>
                       </a:r>
                     </a:p>
                   </a:txBody>
@@ -18762,7 +18762,7 @@
                           </a:solidFill>
                           <a:latin typeface="Aptos"/>
                         </a:rPr>
-                        <a:t>(1,490,846.36)</a:t>
+                        <a:t>(2,497,139.36)</a:t>
                       </a:r>
                     </a:p>
                   </a:txBody>
@@ -18860,7 +18860,7 @@
                           </a:solidFill>
                           <a:latin typeface="Aptos"/>
                         </a:rPr>
-                        <a:t>(2,416,279.73)</a:t>
+                        <a:t>(2,645,279.73)</a:t>
                       </a:r>
                     </a:p>
                   </a:txBody>
@@ -18909,7 +18909,7 @@
                           </a:solidFill>
                           <a:latin typeface="Aptos"/>
                         </a:rPr>
-                        <a:t>(4,327,453.78)</a:t>
+                        <a:t>(5,562,746.78)</a:t>
                       </a:r>
                     </a:p>
                   </a:txBody>
@@ -19129,13 +19129,13 @@
                 <a:tableStyleId>{2D5ABB26-0587-4C30-8999-92F81FD0307C}</a:tableStyleId>
               </a:tblPr>
               <a:tblGrid>
-                <a:gridCol w="2743200"/>
-                <a:gridCol w="1234440"/>
-                <a:gridCol w="1234440"/>
-                <a:gridCol w="1234440"/>
-                <a:gridCol w="1325880"/>
+                <a:gridCol w="2331720"/>
+                <a:gridCol w="1188720"/>
+                <a:gridCol w="1188720"/>
+                <a:gridCol w="1188720"/>
+                <a:gridCol w="1280160"/>
                 <a:gridCol w="685800"/>
-                <a:gridCol w="3218688"/>
+                <a:gridCol w="3813048"/>
               </a:tblGrid>
               <a:tr h="274320">
                 <a:tc>
@@ -19498,7 +19498,7 @@
                           </a:solidFill>
                           <a:latin typeface="Aptos"/>
                         </a:rPr>
-                        <a:t>Repayment from related parties</a:t>
+                        <a:t>Collection of Investor funds</a:t>
                       </a:r>
                     </a:p>
                   </a:txBody>
@@ -19543,11 +19543,11 @@
                       <a:r>
                         <a:rPr b="1" sz="950">
                           <a:solidFill>
-                            <a:srgbClr val="C00000"/>
-                          </a:solidFill>
-                          <a:latin typeface="Aptos"/>
-                        </a:rPr>
-                        <a:t>(79,760.50)</a:t>
+                            <a:srgbClr val="0F172A"/>
+                          </a:solidFill>
+                          <a:latin typeface="Aptos"/>
+                        </a:rPr>
+                        <a:t>720,000.00</a:t>
                       </a:r>
                     </a:p>
                   </a:txBody>
@@ -19596,7 +19596,7 @@
                           </a:solidFill>
                           <a:latin typeface="Aptos"/>
                         </a:rPr>
-                        <a:t>230,281.85</a:t>
+                        <a:t>0.00</a:t>
                       </a:r>
                     </a:p>
                   </a:txBody>
@@ -19645,7 +19645,7 @@
                           </a:solidFill>
                           <a:latin typeface="Aptos"/>
                         </a:rPr>
-                        <a:t>15,899.00</a:t>
+                        <a:t>229,000.00</a:t>
                       </a:r>
                     </a:p>
                   </a:txBody>
@@ -19694,7 +19694,7 @@
                           </a:solidFill>
                           <a:latin typeface="Aptos"/>
                         </a:rPr>
-                        <a:t>166,420.35</a:t>
+                        <a:t>949,000.00</a:t>
                       </a:r>
                     </a:p>
                   </a:txBody>
@@ -19743,7 +19743,7 @@
                           </a:solidFill>
                           <a:latin typeface="Aptos"/>
                         </a:rPr>
-                        <a:t>21.5%</a:t>
+                        <a:t>42.0%</a:t>
                       </a:r>
                     </a:p>
                   </a:txBody>
@@ -19792,7 +19792,7 @@
                           </a:solidFill>
                           <a:latin typeface="Aptos"/>
                         </a:rPr>
-                        <a:t>Net outflow in Jul; RM230.3K received in Aug</a:t>
+                        <a:t>Jul: Dungun 120K, Pekan 600K; Sep: Imam Khairi 169K, PG 60K</a:t>
                       </a:r>
                     </a:p>
                   </a:txBody>
@@ -19843,7 +19843,7 @@
                           </a:solidFill>
                           <a:latin typeface="Aptos"/>
                         </a:rPr>
-                        <a:t>Purchase of investment</a:t>
+                        <a:t>Repayment from related parties</a:t>
                       </a:r>
                     </a:p>
                   </a:txBody>
@@ -19888,11 +19888,11 @@
                       <a:r>
                         <a:rPr b="1" sz="950">
                           <a:solidFill>
-                            <a:srgbClr val="C00000"/>
-                          </a:solidFill>
-                          <a:latin typeface="Aptos"/>
-                        </a:rPr>
-                        <a:t>(286,293.00)</a:t>
+                            <a:srgbClr val="0F172A"/>
+                          </a:solidFill>
+                          <a:latin typeface="Aptos"/>
+                        </a:rPr>
+                        <a:t>0.00</a:t>
                       </a:r>
                     </a:p>
                   </a:txBody>
@@ -19941,7 +19941,7 @@
                           </a:solidFill>
                           <a:latin typeface="Aptos"/>
                         </a:rPr>
-                        <a:t>0.00</a:t>
+                        <a:t>210,691.35</a:t>
                       </a:r>
                     </a:p>
                   </a:txBody>
@@ -19990,7 +19990,7 @@
                           </a:solidFill>
                           <a:latin typeface="Aptos"/>
                         </a:rPr>
-                        <a:t>0.00</a:t>
+                        <a:t>8,189.42</a:t>
                       </a:r>
                     </a:p>
                   </a:txBody>
@@ -20035,11 +20035,11 @@
                       <a:r>
                         <a:rPr b="1" sz="950">
                           <a:solidFill>
-                            <a:srgbClr val="C00000"/>
-                          </a:solidFill>
-                          <a:latin typeface="Aptos"/>
-                        </a:rPr>
-                        <a:t>(286,293.00)</a:t>
+                            <a:srgbClr val="0F172A"/>
+                          </a:solidFill>
+                          <a:latin typeface="Aptos"/>
+                        </a:rPr>
+                        <a:t>218,880.77</a:t>
                       </a:r>
                     </a:p>
                   </a:txBody>
@@ -20088,7 +20088,7 @@
                           </a:solidFill>
                           <a:latin typeface="Aptos"/>
                         </a:rPr>
-                        <a:t>18.9%</a:t>
+                        <a:t>9.7%</a:t>
                       </a:r>
                     </a:p>
                   </a:txBody>
@@ -20137,7 +20137,7 @@
                           </a:solidFill>
                           <a:latin typeface="Aptos"/>
                         </a:rPr>
-                        <a:t>Jul only (recorded under financing)</a:t>
+                        <a:t>Aug mainly Authentic RM210.6K; Sep TGCK RM8.2K</a:t>
                       </a:r>
                     </a:p>
                   </a:txBody>
@@ -20433,7 +20433,7 @@
                           </a:solidFill>
                           <a:latin typeface="Aptos"/>
                         </a:rPr>
-                        <a:t>31.4%</a:t>
+                        <a:t>21.0%</a:t>
                       </a:r>
                     </a:p>
                   </a:txBody>
@@ -20582,7 +20582,7 @@
                           </a:solidFill>
                           <a:latin typeface="Aptos"/>
                         </a:rPr>
-                        <a:t>(233,400.76)</a:t>
+                        <a:t>(417,714.58)</a:t>
                       </a:r>
                     </a:p>
                   </a:txBody>
@@ -20680,7 +20680,7 @@
                           </a:solidFill>
                           <a:latin typeface="Aptos"/>
                         </a:rPr>
-                        <a:t>(192,813.64)</a:t>
+                        <a:t>(201,003.06)</a:t>
                       </a:r>
                     </a:p>
                   </a:txBody>
@@ -20729,7 +20729,7 @@
                           </a:solidFill>
                           <a:latin typeface="Aptos"/>
                         </a:rPr>
-                        <a:t>(426,632.33)</a:t>
+                        <a:t>(619,135.57)</a:t>
                       </a:r>
                     </a:p>
                   </a:txBody>
@@ -20778,7 +20778,7 @@
                           </a:solidFill>
                           <a:latin typeface="Aptos"/>
                         </a:rPr>
-                        <a:t>28.2%</a:t>
+                        <a:t>27.4%</a:t>
                       </a:r>
                     </a:p>
                   </a:txBody>
@@ -20827,7 +20827,7 @@
                           </a:solidFill>
                           <a:latin typeface="Aptos"/>
                         </a:rPr>
-                        <a:t>Jul-26 highest; Aug-26 minimal</a:t>
+                        <a:t>Jul: Bebeks 193.7K, Authentic 168.6K; Sep: Rindu Rasa 188.6K</a:t>
                       </a:r>
                     </a:p>
                   </a:txBody>
@@ -20923,11 +20923,11 @@
                       <a:r>
                         <a:rPr b="1" sz="950">
                           <a:solidFill>
-                            <a:srgbClr val="C00000"/>
-                          </a:solidFill>
-                          <a:latin typeface="Aptos"/>
-                        </a:rPr>
-                        <a:t>(759,199.41)</a:t>
+                            <a:srgbClr val="0F172A"/>
+                          </a:solidFill>
+                          <a:latin typeface="Aptos"/>
+                        </a:rPr>
+                        <a:t>142,540.27</a:t>
                       </a:r>
                     </a:p>
                   </a:txBody>
@@ -20976,7 +20976,7 @@
                           </a:solidFill>
                           <a:latin typeface="Aptos"/>
                         </a:rPr>
-                        <a:t>74,626.92</a:t>
+                        <a:t>55,036.42</a:t>
                       </a:r>
                     </a:p>
                   </a:txBody>
@@ -21025,7 +21025,7 @@
                           </a:solidFill>
                           <a:latin typeface="Aptos"/>
                         </a:rPr>
-                        <a:t>(336,801.93)</a:t>
+                        <a:t>(123,700.93)</a:t>
                       </a:r>
                     </a:p>
                   </a:txBody>
@@ -21070,11 +21070,11 @@
                       <a:r>
                         <a:rPr b="1" sz="950">
                           <a:solidFill>
-                            <a:srgbClr val="C00000"/>
-                          </a:solidFill>
-                          <a:latin typeface="Aptos"/>
-                        </a:rPr>
-                        <a:t>(1,021,374.42)</a:t>
+                            <a:srgbClr val="0F172A"/>
+                          </a:solidFill>
+                          <a:latin typeface="Aptos"/>
+                        </a:rPr>
+                        <a:t>73,875.76</a:t>
                       </a:r>
                     </a:p>
                   </a:txBody>
@@ -21172,7 +21172,7 @@
                           </a:solidFill>
                           <a:latin typeface="Aptos"/>
                         </a:rPr>
-                        <a:t>Aug-26 positive; Jul-26 lowest</a:t>
+                        <a:t>Positive Jul-Aug; Sep-26 net outflow</a:t>
                       </a:r>
                     </a:p>
                   </a:txBody>

--- a/q3-finance-report/Q3_2026_Finance_Report.pptx
+++ b/q3-finance-report/Q3_2026_Finance_Report.pptx
@@ -3330,7 +3330,7 @@
                 </a:solidFill>
                 <a:latin typeface="Aptos"/>
               </a:rPr>
-              <a:t>Source: TGFB Cash Flow Statement PDFs for July, August and September 2026 (latest revised upload)</a:t>
+              <a:t>Source: TGFB Cash Flow Statement PDFs for July, August and September 2026 (latest revised upload). Sep interest received (RM8,970.22) shown under financing; statement shows it under investing.</a:t>
             </a:r>
           </a:p>
         </p:txBody>
@@ -5597,7 +5597,7 @@
                           </a:solidFill>
                           <a:latin typeface="Aptos"/>
                         </a:rPr>
-                        <a:t>(2,645,279.73)</a:t>
+                        <a:t>(2,654,249.95)</a:t>
                       </a:r>
                     </a:p>
                   </a:txBody>
@@ -5646,7 +5646,7 @@
                           </a:solidFill>
                           <a:latin typeface="Aptos"/>
                         </a:rPr>
-                        <a:t>(5,562,746.78)</a:t>
+                        <a:t>(5,571,717.00)</a:t>
                       </a:r>
                     </a:p>
                   </a:txBody>
@@ -5893,7 +5893,7 @@
                           </a:solidFill>
                           <a:latin typeface="Aptos"/>
                         </a:rPr>
-                        <a:t>(123,700.93)</a:t>
+                        <a:t>(114,730.71)</a:t>
                       </a:r>
                     </a:p>
                   </a:txBody>
@@ -5942,7 +5942,7 @@
                           </a:solidFill>
                           <a:latin typeface="Aptos"/>
                         </a:rPr>
-                        <a:t>73,875.76</a:t>
+                        <a:t>82,845.98</a:t>
                       </a:r>
                     </a:p>
                   </a:txBody>
@@ -6658,7 +6658,7 @@
                 </a:solidFill>
                 <a:latin typeface="Aptos"/>
               </a:rPr>
-              <a:t>Source: TGFB Cash Flow Statement PDFs for July, August and September 2026 (latest revised upload)</a:t>
+              <a:t>Source: TGFB Cash Flow Statement PDFs for July, August and September 2026 (latest revised upload). Sep interest received (RM8,970.22) shown under financing; statement shows it under investing.</a:t>
             </a:r>
           </a:p>
         </p:txBody>
@@ -9199,7 +9199,7 @@
                 </a:solidFill>
                 <a:latin typeface="Aptos"/>
               </a:rPr>
-              <a:t>Source: TGFB Cash Flow Statement PDFs for July, August and September 2026 (latest revised upload)</a:t>
+              <a:t>Source: TGFB Cash Flow Statement PDFs for July, August and September 2026 (latest revised upload). Sep interest received (RM8,970.22) shown under financing; statement shows it under investing.</a:t>
             </a:r>
           </a:p>
         </p:txBody>
@@ -16186,7 +16186,7 @@
                 </a:solidFill>
                 <a:latin typeface="Aptos"/>
               </a:rPr>
-              <a:t>Source: TGFB Cash Flow Statement PDFs for July, August and September 2026 (latest revised upload)</a:t>
+              <a:t>Source: TGFB Cash Flow Statement PDFs for July, August and September 2026 (latest revised upload). Sep interest received (RM8,970.22) shown under financing; statement shows it under investing.</a:t>
             </a:r>
           </a:p>
         </p:txBody>
@@ -16265,7 +16265,7 @@
         </p:nvGraphicFramePr>
         <p:xfrm>
           <a:off x="256032" y="1609344"/>
-          <a:ext cx="11676888" cy="2194560"/>
+          <a:ext cx="11676888" cy="1920240"/>
         </p:xfrm>
         <a:graphic>
           <a:graphicData uri="http://schemas.openxmlformats.org/drawingml/2006/table">
@@ -16988,7 +16988,7 @@
                           </a:solidFill>
                           <a:latin typeface="Aptos"/>
                         </a:rPr>
-                        <a:t>Interest received (Maybank pooled)</a:t>
+                        <a:t>Purchase of property and equipment</a:t>
                       </a:r>
                     </a:p>
                   </a:txBody>
@@ -17033,11 +17033,11 @@
                       <a:r>
                         <a:rPr b="1" sz="950">
                           <a:solidFill>
-                            <a:srgbClr val="0F172A"/>
-                          </a:solidFill>
-                          <a:latin typeface="Aptos"/>
-                        </a:rPr>
-                        <a:t>0.00</a:t>
+                            <a:srgbClr val="C00000"/>
+                          </a:solidFill>
+                          <a:latin typeface="Aptos"/>
+                        </a:rPr>
+                        <a:t>(100,223.00)</a:t>
                       </a:r>
                     </a:p>
                   </a:txBody>
@@ -17082,11 +17082,11 @@
                       <a:r>
                         <a:rPr b="1" sz="950">
                           <a:solidFill>
-                            <a:srgbClr val="0F172A"/>
-                          </a:solidFill>
-                          <a:latin typeface="Aptos"/>
-                        </a:rPr>
-                        <a:t>0.00</a:t>
+                            <a:srgbClr val="C00000"/>
+                          </a:solidFill>
+                          <a:latin typeface="Aptos"/>
+                        </a:rPr>
+                        <a:t>(17,369.00)</a:t>
                       </a:r>
                     </a:p>
                   </a:txBody>
@@ -17131,11 +17131,11 @@
                       <a:r>
                         <a:rPr b="1" sz="950">
                           <a:solidFill>
-                            <a:srgbClr val="0F172A"/>
-                          </a:solidFill>
-                          <a:latin typeface="Aptos"/>
-                        </a:rPr>
-                        <a:t>8,970.22</a:t>
+                            <a:srgbClr val="C00000"/>
+                          </a:solidFill>
+                          <a:latin typeface="Aptos"/>
+                        </a:rPr>
+                        <a:t>(14,400.00)</a:t>
                       </a:r>
                     </a:p>
                   </a:txBody>
@@ -17180,11 +17180,11 @@
                       <a:r>
                         <a:rPr b="1" sz="950">
                           <a:solidFill>
-                            <a:srgbClr val="0F172A"/>
-                          </a:solidFill>
-                          <a:latin typeface="Aptos"/>
-                        </a:rPr>
-                        <a:t>8,970.22</a:t>
+                            <a:srgbClr val="C00000"/>
+                          </a:solidFill>
+                          <a:latin typeface="Aptos"/>
+                        </a:rPr>
+                        <a:t>(131,992.00)</a:t>
                       </a:r>
                     </a:p>
                   </a:txBody>
@@ -17233,7 +17233,7 @@
                           </a:solidFill>
                           <a:latin typeface="Aptos"/>
                         </a:rPr>
-                        <a:t>0.2%</a:t>
+                        <a:t>2.2%</a:t>
                       </a:r>
                     </a:p>
                   </a:txBody>
@@ -17282,7 +17282,7 @@
                           </a:solidFill>
                           <a:latin typeface="Aptos"/>
                         </a:rPr>
-                        <a:t>Interest from Maybank pooled account</a:t>
+                        <a:t>Jul truck &amp; phone; reduced every month</a:t>
                       </a:r>
                     </a:p>
                   </a:txBody>
@@ -17333,7 +17333,7 @@
                           </a:solidFill>
                           <a:latin typeface="Aptos"/>
                         </a:rPr>
-                        <a:t>Purchase of property and equipment</a:t>
+                        <a:t>Capex New Branches</a:t>
                       </a:r>
                     </a:p>
                   </a:txBody>
@@ -17382,7 +17382,7 @@
                           </a:solidFill>
                           <a:latin typeface="Aptos"/>
                         </a:rPr>
-                        <a:t>(100,223.00)</a:t>
+                        <a:t>(2,300,748.36)</a:t>
                       </a:r>
                     </a:p>
                   </a:txBody>
@@ -17431,7 +17431,7 @@
                           </a:solidFill>
                           <a:latin typeface="Aptos"/>
                         </a:rPr>
-                        <a:t>(17,369.00)</a:t>
+                        <a:t>(402,958.69)</a:t>
                       </a:r>
                     </a:p>
                   </a:txBody>
@@ -17480,7 +17480,7 @@
                           </a:solidFill>
                           <a:latin typeface="Aptos"/>
                         </a:rPr>
-                        <a:t>(14,400.00)</a:t>
+                        <a:t>(639,849.95)</a:t>
                       </a:r>
                     </a:p>
                   </a:txBody>
@@ -17529,7 +17529,7 @@
                           </a:solidFill>
                           <a:latin typeface="Aptos"/>
                         </a:rPr>
-                        <a:t>(131,992.00)</a:t>
+                        <a:t>(3,343,557.00)</a:t>
                       </a:r>
                     </a:p>
                   </a:txBody>
@@ -17578,7 +17578,7 @@
                           </a:solidFill>
                           <a:latin typeface="Aptos"/>
                         </a:rPr>
-                        <a:t>2.2%</a:t>
+                        <a:t>56.2%</a:t>
                       </a:r>
                     </a:p>
                   </a:txBody>
@@ -17627,7 +17627,7 @@
                           </a:solidFill>
                           <a:latin typeface="Aptos"/>
                         </a:rPr>
-                        <a:t>Jul truck &amp; phone; reduced every month</a:t>
+                        <a:t>For outlet expansion; Jul-26 highest</a:t>
                       </a:r>
                     </a:p>
                   </a:txBody>
@@ -17678,7 +17678,7 @@
                           </a:solidFill>
                           <a:latin typeface="Aptos"/>
                         </a:rPr>
-                        <a:t>Capex New Branches</a:t>
+                        <a:t>Placement of Fixed Deposit</a:t>
                       </a:r>
                     </a:p>
                   </a:txBody>
@@ -17723,11 +17723,11 @@
                       <a:r>
                         <a:rPr b="1" sz="950">
                           <a:solidFill>
-                            <a:srgbClr val="C00000"/>
-                          </a:solidFill>
-                          <a:latin typeface="Aptos"/>
-                        </a:rPr>
-                        <a:t>(2,300,748.36)</a:t>
+                            <a:srgbClr val="0F172A"/>
+                          </a:solidFill>
+                          <a:latin typeface="Aptos"/>
+                        </a:rPr>
+                        <a:t>0.00</a:t>
                       </a:r>
                     </a:p>
                   </a:txBody>
@@ -17772,11 +17772,11 @@
                       <a:r>
                         <a:rPr b="1" sz="950">
                           <a:solidFill>
-                            <a:srgbClr val="C00000"/>
-                          </a:solidFill>
-                          <a:latin typeface="Aptos"/>
-                        </a:rPr>
-                        <a:t>(402,958.69)</a:t>
+                            <a:srgbClr val="0F172A"/>
+                          </a:solidFill>
+                          <a:latin typeface="Aptos"/>
+                        </a:rPr>
+                        <a:t>0.00</a:t>
                       </a:r>
                     </a:p>
                   </a:txBody>
@@ -17825,7 +17825,7 @@
                           </a:solidFill>
                           <a:latin typeface="Aptos"/>
                         </a:rPr>
-                        <a:t>(639,849.95)</a:t>
+                        <a:t>(2,000,000.00)</a:t>
                       </a:r>
                     </a:p>
                   </a:txBody>
@@ -17874,7 +17874,7 @@
                           </a:solidFill>
                           <a:latin typeface="Aptos"/>
                         </a:rPr>
-                        <a:t>(3,343,557.00)</a:t>
+                        <a:t>(2,000,000.00)</a:t>
                       </a:r>
                     </a:p>
                   </a:txBody>
@@ -17923,7 +17923,7 @@
                           </a:solidFill>
                           <a:latin typeface="Aptos"/>
                         </a:rPr>
-                        <a:t>56.1%</a:t>
+                        <a:t>33.6%</a:t>
                       </a:r>
                     </a:p>
                   </a:txBody>
@@ -17972,7 +17972,7 @@
                           </a:solidFill>
                           <a:latin typeface="Aptos"/>
                         </a:rPr>
-                        <a:t>For outlet expansion; Jul-26 highest</a:t>
+                        <a:t>RM2.0M placed in fixed deposit in Sep</a:t>
                       </a:r>
                     </a:p>
                   </a:txBody>
@@ -18023,7 +18023,7 @@
                           </a:solidFill>
                           <a:latin typeface="Aptos"/>
                         </a:rPr>
-                        <a:t>Placement of Fixed Deposit</a:t>
+                        <a:t>Purchase of investment</a:t>
                       </a:r>
                     </a:p>
                   </a:txBody>
@@ -18068,11 +18068,11 @@
                       <a:r>
                         <a:rPr b="1" sz="950">
                           <a:solidFill>
-                            <a:srgbClr val="0F172A"/>
-                          </a:solidFill>
-                          <a:latin typeface="Aptos"/>
-                        </a:rPr>
-                        <a:t>0.00</a:t>
+                            <a:srgbClr val="C00000"/>
+                          </a:solidFill>
+                          <a:latin typeface="Aptos"/>
+                        </a:rPr>
+                        <a:t>(286,293.00)</a:t>
                       </a:r>
                     </a:p>
                   </a:txBody>
@@ -18166,11 +18166,11 @@
                       <a:r>
                         <a:rPr b="1" sz="950">
                           <a:solidFill>
-                            <a:srgbClr val="C00000"/>
-                          </a:solidFill>
-                          <a:latin typeface="Aptos"/>
-                        </a:rPr>
-                        <a:t>(2,000,000.00)</a:t>
+                            <a:srgbClr val="0F172A"/>
+                          </a:solidFill>
+                          <a:latin typeface="Aptos"/>
+                        </a:rPr>
+                        <a:t>0.00</a:t>
                       </a:r>
                     </a:p>
                   </a:txBody>
@@ -18219,7 +18219,7 @@
                           </a:solidFill>
                           <a:latin typeface="Aptos"/>
                         </a:rPr>
-                        <a:t>(2,000,000.00)</a:t>
+                        <a:t>(286,293.00)</a:t>
                       </a:r>
                     </a:p>
                   </a:txBody>
@@ -18268,7 +18268,7 @@
                           </a:solidFill>
                           <a:latin typeface="Aptos"/>
                         </a:rPr>
-                        <a:t>33.6%</a:t>
+                        <a:t>4.8%</a:t>
                       </a:r>
                     </a:p>
                   </a:txBody>
@@ -18317,7 +18317,7 @@
                           </a:solidFill>
                           <a:latin typeface="Aptos"/>
                         </a:rPr>
-                        <a:t>RM2.0M placed in fixed deposit in Sep</a:t>
+                        <a:t>Jul fixed deposit (per accounts remark)</a:t>
                       </a:r>
                     </a:p>
                   </a:txBody>
@@ -18364,41 +18364,41 @@
                       <a:r>
                         <a:rPr b="1" sz="950">
                           <a:solidFill>
-                            <a:srgbClr val="0F172A"/>
-                          </a:solidFill>
-                          <a:latin typeface="Aptos"/>
-                        </a:rPr>
-                        <a:t>Purchase of investment</a:t>
-                      </a:r>
-                    </a:p>
-                  </a:txBody>
-                  <a:tcPr marL="45720" marR="45720" marT="0" marB="0" anchor="ctr">
-                    <a:lnL w="12700" cap="flat" cmpd="sng" algn="ctr">
-                      <a:solidFill>
-                        <a:srgbClr val="FFFFFF"/>
-                      </a:solidFill>
-                      <a:prstDash val="solid"/>
-                    </a:lnL>
-                    <a:lnR w="12700" cap="flat" cmpd="sng" algn="ctr">
-                      <a:solidFill>
-                        <a:srgbClr val="FFFFFF"/>
-                      </a:solidFill>
-                      <a:prstDash val="solid"/>
-                    </a:lnR>
-                    <a:lnT w="12700" cap="flat" cmpd="sng" algn="ctr">
-                      <a:solidFill>
-                        <a:srgbClr val="FFFFFF"/>
-                      </a:solidFill>
-                      <a:prstDash val="solid"/>
-                    </a:lnT>
-                    <a:lnB w="12700" cap="flat" cmpd="sng" algn="ctr">
-                      <a:solidFill>
-                        <a:srgbClr val="FFFFFF"/>
-                      </a:solidFill>
-                      <a:prstDash val="solid"/>
-                    </a:lnB>
-                    <a:solidFill>
-                      <a:srgbClr val="FFF2B3"/>
+                            <a:srgbClr val="FFFFFF"/>
+                          </a:solidFill>
+                          <a:latin typeface="Aptos"/>
+                        </a:rPr>
+                        <a:t>NET INVESTING ACTIVITIES</a:t>
+                      </a:r>
+                    </a:p>
+                  </a:txBody>
+                  <a:tcPr marL="45720" marR="45720" marT="0" marB="0" anchor="ctr">
+                    <a:lnL w="12700" cap="flat" cmpd="sng" algn="ctr">
+                      <a:solidFill>
+                        <a:srgbClr val="FFFFFF"/>
+                      </a:solidFill>
+                      <a:prstDash val="solid"/>
+                    </a:lnL>
+                    <a:lnR w="12700" cap="flat" cmpd="sng" algn="ctr">
+                      <a:solidFill>
+                        <a:srgbClr val="FFFFFF"/>
+                      </a:solidFill>
+                      <a:prstDash val="solid"/>
+                    </a:lnR>
+                    <a:lnT w="12700" cap="flat" cmpd="sng" algn="ctr">
+                      <a:solidFill>
+                        <a:srgbClr val="FFFFFF"/>
+                      </a:solidFill>
+                      <a:prstDash val="solid"/>
+                    </a:lnT>
+                    <a:lnB w="12700" cap="flat" cmpd="sng" algn="ctr">
+                      <a:solidFill>
+                        <a:srgbClr val="FFFFFF"/>
+                      </a:solidFill>
+                      <a:prstDash val="solid"/>
+                    </a:lnB>
+                    <a:solidFill>
+                      <a:srgbClr val="081E42"/>
                     </a:solidFill>
                   </a:tcPr>
                 </a:tc>
@@ -18417,37 +18417,37 @@
                           </a:solidFill>
                           <a:latin typeface="Aptos"/>
                         </a:rPr>
-                        <a:t>(286,293.00)</a:t>
-                      </a:r>
-                    </a:p>
-                  </a:txBody>
-                  <a:tcPr marL="45720" marR="45720" marT="0" marB="0" anchor="ctr">
-                    <a:lnL w="12700" cap="flat" cmpd="sng" algn="ctr">
-                      <a:solidFill>
-                        <a:srgbClr val="FFFFFF"/>
-                      </a:solidFill>
-                      <a:prstDash val="solid"/>
-                    </a:lnL>
-                    <a:lnR w="12700" cap="flat" cmpd="sng" algn="ctr">
-                      <a:solidFill>
-                        <a:srgbClr val="FFFFFF"/>
-                      </a:solidFill>
-                      <a:prstDash val="solid"/>
-                    </a:lnR>
-                    <a:lnT w="12700" cap="flat" cmpd="sng" algn="ctr">
-                      <a:solidFill>
-                        <a:srgbClr val="FFFFFF"/>
-                      </a:solidFill>
-                      <a:prstDash val="solid"/>
-                    </a:lnT>
-                    <a:lnB w="12700" cap="flat" cmpd="sng" algn="ctr">
-                      <a:solidFill>
-                        <a:srgbClr val="FFFFFF"/>
-                      </a:solidFill>
-                      <a:prstDash val="solid"/>
-                    </a:lnB>
-                    <a:solidFill>
-                      <a:srgbClr val="F8FAFC"/>
+                        <a:t>(2,497,139.36)</a:t>
+                      </a:r>
+                    </a:p>
+                  </a:txBody>
+                  <a:tcPr marL="45720" marR="45720" marT="0" marB="0" anchor="ctr">
+                    <a:lnL w="12700" cap="flat" cmpd="sng" algn="ctr">
+                      <a:solidFill>
+                        <a:srgbClr val="FFFFFF"/>
+                      </a:solidFill>
+                      <a:prstDash val="solid"/>
+                    </a:lnL>
+                    <a:lnR w="12700" cap="flat" cmpd="sng" algn="ctr">
+                      <a:solidFill>
+                        <a:srgbClr val="FFFFFF"/>
+                      </a:solidFill>
+                      <a:prstDash val="solid"/>
+                    </a:lnR>
+                    <a:lnT w="12700" cap="flat" cmpd="sng" algn="ctr">
+                      <a:solidFill>
+                        <a:srgbClr val="FFFFFF"/>
+                      </a:solidFill>
+                      <a:prstDash val="solid"/>
+                    </a:lnT>
+                    <a:lnB w="12700" cap="flat" cmpd="sng" algn="ctr">
+                      <a:solidFill>
+                        <a:srgbClr val="FFFFFF"/>
+                      </a:solidFill>
+                      <a:prstDash val="solid"/>
+                    </a:lnB>
+                    <a:solidFill>
+                      <a:srgbClr val="FFC20E"/>
                     </a:solidFill>
                   </a:tcPr>
                 </a:tc>
@@ -18462,41 +18462,41 @@
                       <a:r>
                         <a:rPr b="1" sz="950">
                           <a:solidFill>
-                            <a:srgbClr val="0F172A"/>
-                          </a:solidFill>
-                          <a:latin typeface="Aptos"/>
-                        </a:rPr>
-                        <a:t>0.00</a:t>
-                      </a:r>
-                    </a:p>
-                  </a:txBody>
-                  <a:tcPr marL="45720" marR="45720" marT="0" marB="0" anchor="ctr">
-                    <a:lnL w="12700" cap="flat" cmpd="sng" algn="ctr">
-                      <a:solidFill>
-                        <a:srgbClr val="FFFFFF"/>
-                      </a:solidFill>
-                      <a:prstDash val="solid"/>
-                    </a:lnL>
-                    <a:lnR w="12700" cap="flat" cmpd="sng" algn="ctr">
-                      <a:solidFill>
-                        <a:srgbClr val="FFFFFF"/>
-                      </a:solidFill>
-                      <a:prstDash val="solid"/>
-                    </a:lnR>
-                    <a:lnT w="12700" cap="flat" cmpd="sng" algn="ctr">
-                      <a:solidFill>
-                        <a:srgbClr val="FFFFFF"/>
-                      </a:solidFill>
-                      <a:prstDash val="solid"/>
-                    </a:lnT>
-                    <a:lnB w="12700" cap="flat" cmpd="sng" algn="ctr">
-                      <a:solidFill>
-                        <a:srgbClr val="FFFFFF"/>
-                      </a:solidFill>
-                      <a:prstDash val="solid"/>
-                    </a:lnB>
-                    <a:solidFill>
-                      <a:srgbClr val="FFFFFF"/>
+                            <a:srgbClr val="C00000"/>
+                          </a:solidFill>
+                          <a:latin typeface="Aptos"/>
+                        </a:rPr>
+                        <a:t>(420,327.69)</a:t>
+                      </a:r>
+                    </a:p>
+                  </a:txBody>
+                  <a:tcPr marL="45720" marR="45720" marT="0" marB="0" anchor="ctr">
+                    <a:lnL w="12700" cap="flat" cmpd="sng" algn="ctr">
+                      <a:solidFill>
+                        <a:srgbClr val="FFFFFF"/>
+                      </a:solidFill>
+                      <a:prstDash val="solid"/>
+                    </a:lnL>
+                    <a:lnR w="12700" cap="flat" cmpd="sng" algn="ctr">
+                      <a:solidFill>
+                        <a:srgbClr val="FFFFFF"/>
+                      </a:solidFill>
+                      <a:prstDash val="solid"/>
+                    </a:lnR>
+                    <a:lnT w="12700" cap="flat" cmpd="sng" algn="ctr">
+                      <a:solidFill>
+                        <a:srgbClr val="FFFFFF"/>
+                      </a:solidFill>
+                      <a:prstDash val="solid"/>
+                    </a:lnT>
+                    <a:lnB w="12700" cap="flat" cmpd="sng" algn="ctr">
+                      <a:solidFill>
+                        <a:srgbClr val="FFFFFF"/>
+                      </a:solidFill>
+                      <a:prstDash val="solid"/>
+                    </a:lnB>
+                    <a:solidFill>
+                      <a:srgbClr val="FFC20E"/>
                     </a:solidFill>
                   </a:tcPr>
                 </a:tc>
@@ -18511,41 +18511,41 @@
                       <a:r>
                         <a:rPr b="1" sz="950">
                           <a:solidFill>
-                            <a:srgbClr val="0F172A"/>
-                          </a:solidFill>
-                          <a:latin typeface="Aptos"/>
-                        </a:rPr>
-                        <a:t>0.00</a:t>
-                      </a:r>
-                    </a:p>
-                  </a:txBody>
-                  <a:tcPr marL="45720" marR="45720" marT="0" marB="0" anchor="ctr">
-                    <a:lnL w="12700" cap="flat" cmpd="sng" algn="ctr">
-                      <a:solidFill>
-                        <a:srgbClr val="FFFFFF"/>
-                      </a:solidFill>
-                      <a:prstDash val="solid"/>
-                    </a:lnL>
-                    <a:lnR w="12700" cap="flat" cmpd="sng" algn="ctr">
-                      <a:solidFill>
-                        <a:srgbClr val="FFFFFF"/>
-                      </a:solidFill>
-                      <a:prstDash val="solid"/>
-                    </a:lnR>
-                    <a:lnT w="12700" cap="flat" cmpd="sng" algn="ctr">
-                      <a:solidFill>
-                        <a:srgbClr val="FFFFFF"/>
-                      </a:solidFill>
-                      <a:prstDash val="solid"/>
-                    </a:lnT>
-                    <a:lnB w="12700" cap="flat" cmpd="sng" algn="ctr">
-                      <a:solidFill>
-                        <a:srgbClr val="FFFFFF"/>
-                      </a:solidFill>
-                      <a:prstDash val="solid"/>
-                    </a:lnB>
-                    <a:solidFill>
-                      <a:srgbClr val="F8FAFC"/>
+                            <a:srgbClr val="C00000"/>
+                          </a:solidFill>
+                          <a:latin typeface="Aptos"/>
+                        </a:rPr>
+                        <a:t>(2,654,249.95)</a:t>
+                      </a:r>
+                    </a:p>
+                  </a:txBody>
+                  <a:tcPr marL="45720" marR="45720" marT="0" marB="0" anchor="ctr">
+                    <a:lnL w="12700" cap="flat" cmpd="sng" algn="ctr">
+                      <a:solidFill>
+                        <a:srgbClr val="FFFFFF"/>
+                      </a:solidFill>
+                      <a:prstDash val="solid"/>
+                    </a:lnL>
+                    <a:lnR w="12700" cap="flat" cmpd="sng" algn="ctr">
+                      <a:solidFill>
+                        <a:srgbClr val="FFFFFF"/>
+                      </a:solidFill>
+                      <a:prstDash val="solid"/>
+                    </a:lnR>
+                    <a:lnT w="12700" cap="flat" cmpd="sng" algn="ctr">
+                      <a:solidFill>
+                        <a:srgbClr val="FFFFFF"/>
+                      </a:solidFill>
+                      <a:prstDash val="solid"/>
+                    </a:lnT>
+                    <a:lnB w="12700" cap="flat" cmpd="sng" algn="ctr">
+                      <a:solidFill>
+                        <a:srgbClr val="FFFFFF"/>
+                      </a:solidFill>
+                      <a:prstDash val="solid"/>
+                    </a:lnB>
+                    <a:solidFill>
+                      <a:srgbClr val="FFC20E"/>
                     </a:solidFill>
                   </a:tcPr>
                 </a:tc>
@@ -18564,352 +18564,7 @@
                           </a:solidFill>
                           <a:latin typeface="Aptos"/>
                         </a:rPr>
-                        <a:t>(286,293.00)</a:t>
-                      </a:r>
-                    </a:p>
-                  </a:txBody>
-                  <a:tcPr marL="45720" marR="45720" marT="0" marB="0" anchor="ctr">
-                    <a:lnL w="12700" cap="flat" cmpd="sng" algn="ctr">
-                      <a:solidFill>
-                        <a:srgbClr val="FFFFFF"/>
-                      </a:solidFill>
-                      <a:prstDash val="solid"/>
-                    </a:lnL>
-                    <a:lnR w="12700" cap="flat" cmpd="sng" algn="ctr">
-                      <a:solidFill>
-                        <a:srgbClr val="FFFFFF"/>
-                      </a:solidFill>
-                      <a:prstDash val="solid"/>
-                    </a:lnR>
-                    <a:lnT w="12700" cap="flat" cmpd="sng" algn="ctr">
-                      <a:solidFill>
-                        <a:srgbClr val="FFFFFF"/>
-                      </a:solidFill>
-                      <a:prstDash val="solid"/>
-                    </a:lnT>
-                    <a:lnB w="12700" cap="flat" cmpd="sng" algn="ctr">
-                      <a:solidFill>
-                        <a:srgbClr val="FFFFFF"/>
-                      </a:solidFill>
-                      <a:prstDash val="solid"/>
-                    </a:lnB>
-                    <a:solidFill>
-                      <a:srgbClr val="FFFFFF"/>
-                    </a:solidFill>
-                  </a:tcPr>
-                </a:tc>
-                <a:tc>
-                  <a:txBody>
-                    <a:bodyPr wrap="square"/>
-                    <a:lstStyle/>
-                    <a:p>
-                      <a:pPr algn="ctr">
-                        <a:defRPr sz="950"/>
-                      </a:pPr>
-                      <a:r>
-                        <a:rPr b="1" sz="950">
-                          <a:solidFill>
-                            <a:srgbClr val="0F172A"/>
-                          </a:solidFill>
-                          <a:latin typeface="Aptos"/>
-                        </a:rPr>
-                        <a:t>4.8%</a:t>
-                      </a:r>
-                    </a:p>
-                  </a:txBody>
-                  <a:tcPr marL="45720" marR="45720" marT="0" marB="0" anchor="ctr">
-                    <a:lnL w="12700" cap="flat" cmpd="sng" algn="ctr">
-                      <a:solidFill>
-                        <a:srgbClr val="FFFFFF"/>
-                      </a:solidFill>
-                      <a:prstDash val="solid"/>
-                    </a:lnL>
-                    <a:lnR w="12700" cap="flat" cmpd="sng" algn="ctr">
-                      <a:solidFill>
-                        <a:srgbClr val="FFFFFF"/>
-                      </a:solidFill>
-                      <a:prstDash val="solid"/>
-                    </a:lnR>
-                    <a:lnT w="12700" cap="flat" cmpd="sng" algn="ctr">
-                      <a:solidFill>
-                        <a:srgbClr val="FFFFFF"/>
-                      </a:solidFill>
-                      <a:prstDash val="solid"/>
-                    </a:lnT>
-                    <a:lnB w="12700" cap="flat" cmpd="sng" algn="ctr">
-                      <a:solidFill>
-                        <a:srgbClr val="FFFFFF"/>
-                      </a:solidFill>
-                      <a:prstDash val="solid"/>
-                    </a:lnB>
-                    <a:solidFill>
-                      <a:srgbClr val="DDF0F8"/>
-                    </a:solidFill>
-                  </a:tcPr>
-                </a:tc>
-                <a:tc>
-                  <a:txBody>
-                    <a:bodyPr wrap="square"/>
-                    <a:lstStyle/>
-                    <a:p>
-                      <a:pPr algn="l">
-                        <a:defRPr sz="950"/>
-                      </a:pPr>
-                      <a:r>
-                        <a:rPr b="1" sz="950">
-                          <a:solidFill>
-                            <a:srgbClr val="0F172A"/>
-                          </a:solidFill>
-                          <a:latin typeface="Aptos"/>
-                        </a:rPr>
-                        <a:t>Jul fixed deposit (per accounts remark)</a:t>
-                      </a:r>
-                    </a:p>
-                  </a:txBody>
-                  <a:tcPr marL="45720" marR="45720" marT="0" marB="0" anchor="ctr">
-                    <a:lnL w="12700" cap="flat" cmpd="sng" algn="ctr">
-                      <a:solidFill>
-                        <a:srgbClr val="FFFFFF"/>
-                      </a:solidFill>
-                      <a:prstDash val="solid"/>
-                    </a:lnL>
-                    <a:lnR w="12700" cap="flat" cmpd="sng" algn="ctr">
-                      <a:solidFill>
-                        <a:srgbClr val="FFFFFF"/>
-                      </a:solidFill>
-                      <a:prstDash val="solid"/>
-                    </a:lnR>
-                    <a:lnT w="12700" cap="flat" cmpd="sng" algn="ctr">
-                      <a:solidFill>
-                        <a:srgbClr val="FFFFFF"/>
-                      </a:solidFill>
-                      <a:prstDash val="solid"/>
-                    </a:lnT>
-                    <a:lnB w="12700" cap="flat" cmpd="sng" algn="ctr">
-                      <a:solidFill>
-                        <a:srgbClr val="FFFFFF"/>
-                      </a:solidFill>
-                      <a:prstDash val="solid"/>
-                    </a:lnB>
-                    <a:solidFill>
-                      <a:srgbClr val="FFFFFF"/>
-                    </a:solidFill>
-                  </a:tcPr>
-                </a:tc>
-              </a:tr>
-              <a:tr h="274320">
-                <a:tc>
-                  <a:txBody>
-                    <a:bodyPr wrap="square"/>
-                    <a:lstStyle/>
-                    <a:p>
-                      <a:pPr algn="l">
-                        <a:defRPr sz="950"/>
-                      </a:pPr>
-                      <a:r>
-                        <a:rPr b="1" sz="950">
-                          <a:solidFill>
-                            <a:srgbClr val="FFFFFF"/>
-                          </a:solidFill>
-                          <a:latin typeface="Aptos"/>
-                        </a:rPr>
-                        <a:t>NET INVESTING ACTIVITIES</a:t>
-                      </a:r>
-                    </a:p>
-                  </a:txBody>
-                  <a:tcPr marL="45720" marR="45720" marT="0" marB="0" anchor="ctr">
-                    <a:lnL w="12700" cap="flat" cmpd="sng" algn="ctr">
-                      <a:solidFill>
-                        <a:srgbClr val="FFFFFF"/>
-                      </a:solidFill>
-                      <a:prstDash val="solid"/>
-                    </a:lnL>
-                    <a:lnR w="12700" cap="flat" cmpd="sng" algn="ctr">
-                      <a:solidFill>
-                        <a:srgbClr val="FFFFFF"/>
-                      </a:solidFill>
-                      <a:prstDash val="solid"/>
-                    </a:lnR>
-                    <a:lnT w="12700" cap="flat" cmpd="sng" algn="ctr">
-                      <a:solidFill>
-                        <a:srgbClr val="FFFFFF"/>
-                      </a:solidFill>
-                      <a:prstDash val="solid"/>
-                    </a:lnT>
-                    <a:lnB w="12700" cap="flat" cmpd="sng" algn="ctr">
-                      <a:solidFill>
-                        <a:srgbClr val="FFFFFF"/>
-                      </a:solidFill>
-                      <a:prstDash val="solid"/>
-                    </a:lnB>
-                    <a:solidFill>
-                      <a:srgbClr val="081E42"/>
-                    </a:solidFill>
-                  </a:tcPr>
-                </a:tc>
-                <a:tc>
-                  <a:txBody>
-                    <a:bodyPr wrap="square"/>
-                    <a:lstStyle/>
-                    <a:p>
-                      <a:pPr algn="r">
-                        <a:defRPr sz="950"/>
-                      </a:pPr>
-                      <a:r>
-                        <a:rPr b="1" sz="950">
-                          <a:solidFill>
-                            <a:srgbClr val="C00000"/>
-                          </a:solidFill>
-                          <a:latin typeface="Aptos"/>
-                        </a:rPr>
-                        <a:t>(2,497,139.36)</a:t>
-                      </a:r>
-                    </a:p>
-                  </a:txBody>
-                  <a:tcPr marL="45720" marR="45720" marT="0" marB="0" anchor="ctr">
-                    <a:lnL w="12700" cap="flat" cmpd="sng" algn="ctr">
-                      <a:solidFill>
-                        <a:srgbClr val="FFFFFF"/>
-                      </a:solidFill>
-                      <a:prstDash val="solid"/>
-                    </a:lnL>
-                    <a:lnR w="12700" cap="flat" cmpd="sng" algn="ctr">
-                      <a:solidFill>
-                        <a:srgbClr val="FFFFFF"/>
-                      </a:solidFill>
-                      <a:prstDash val="solid"/>
-                    </a:lnR>
-                    <a:lnT w="12700" cap="flat" cmpd="sng" algn="ctr">
-                      <a:solidFill>
-                        <a:srgbClr val="FFFFFF"/>
-                      </a:solidFill>
-                      <a:prstDash val="solid"/>
-                    </a:lnT>
-                    <a:lnB w="12700" cap="flat" cmpd="sng" algn="ctr">
-                      <a:solidFill>
-                        <a:srgbClr val="FFFFFF"/>
-                      </a:solidFill>
-                      <a:prstDash val="solid"/>
-                    </a:lnB>
-                    <a:solidFill>
-                      <a:srgbClr val="FFC20E"/>
-                    </a:solidFill>
-                  </a:tcPr>
-                </a:tc>
-                <a:tc>
-                  <a:txBody>
-                    <a:bodyPr wrap="square"/>
-                    <a:lstStyle/>
-                    <a:p>
-                      <a:pPr algn="r">
-                        <a:defRPr sz="950"/>
-                      </a:pPr>
-                      <a:r>
-                        <a:rPr b="1" sz="950">
-                          <a:solidFill>
-                            <a:srgbClr val="C00000"/>
-                          </a:solidFill>
-                          <a:latin typeface="Aptos"/>
-                        </a:rPr>
-                        <a:t>(420,327.69)</a:t>
-                      </a:r>
-                    </a:p>
-                  </a:txBody>
-                  <a:tcPr marL="45720" marR="45720" marT="0" marB="0" anchor="ctr">
-                    <a:lnL w="12700" cap="flat" cmpd="sng" algn="ctr">
-                      <a:solidFill>
-                        <a:srgbClr val="FFFFFF"/>
-                      </a:solidFill>
-                      <a:prstDash val="solid"/>
-                    </a:lnL>
-                    <a:lnR w="12700" cap="flat" cmpd="sng" algn="ctr">
-                      <a:solidFill>
-                        <a:srgbClr val="FFFFFF"/>
-                      </a:solidFill>
-                      <a:prstDash val="solid"/>
-                    </a:lnR>
-                    <a:lnT w="12700" cap="flat" cmpd="sng" algn="ctr">
-                      <a:solidFill>
-                        <a:srgbClr val="FFFFFF"/>
-                      </a:solidFill>
-                      <a:prstDash val="solid"/>
-                    </a:lnT>
-                    <a:lnB w="12700" cap="flat" cmpd="sng" algn="ctr">
-                      <a:solidFill>
-                        <a:srgbClr val="FFFFFF"/>
-                      </a:solidFill>
-                      <a:prstDash val="solid"/>
-                    </a:lnB>
-                    <a:solidFill>
-                      <a:srgbClr val="FFC20E"/>
-                    </a:solidFill>
-                  </a:tcPr>
-                </a:tc>
-                <a:tc>
-                  <a:txBody>
-                    <a:bodyPr wrap="square"/>
-                    <a:lstStyle/>
-                    <a:p>
-                      <a:pPr algn="r">
-                        <a:defRPr sz="950"/>
-                      </a:pPr>
-                      <a:r>
-                        <a:rPr b="1" sz="950">
-                          <a:solidFill>
-                            <a:srgbClr val="C00000"/>
-                          </a:solidFill>
-                          <a:latin typeface="Aptos"/>
-                        </a:rPr>
-                        <a:t>(2,645,279.73)</a:t>
-                      </a:r>
-                    </a:p>
-                  </a:txBody>
-                  <a:tcPr marL="45720" marR="45720" marT="0" marB="0" anchor="ctr">
-                    <a:lnL w="12700" cap="flat" cmpd="sng" algn="ctr">
-                      <a:solidFill>
-                        <a:srgbClr val="FFFFFF"/>
-                      </a:solidFill>
-                      <a:prstDash val="solid"/>
-                    </a:lnL>
-                    <a:lnR w="12700" cap="flat" cmpd="sng" algn="ctr">
-                      <a:solidFill>
-                        <a:srgbClr val="FFFFFF"/>
-                      </a:solidFill>
-                      <a:prstDash val="solid"/>
-                    </a:lnR>
-                    <a:lnT w="12700" cap="flat" cmpd="sng" algn="ctr">
-                      <a:solidFill>
-                        <a:srgbClr val="FFFFFF"/>
-                      </a:solidFill>
-                      <a:prstDash val="solid"/>
-                    </a:lnT>
-                    <a:lnB w="12700" cap="flat" cmpd="sng" algn="ctr">
-                      <a:solidFill>
-                        <a:srgbClr val="FFFFFF"/>
-                      </a:solidFill>
-                      <a:prstDash val="solid"/>
-                    </a:lnB>
-                    <a:solidFill>
-                      <a:srgbClr val="FFC20E"/>
-                    </a:solidFill>
-                  </a:tcPr>
-                </a:tc>
-                <a:tc>
-                  <a:txBody>
-                    <a:bodyPr wrap="square"/>
-                    <a:lstStyle/>
-                    <a:p>
-                      <a:pPr algn="r">
-                        <a:defRPr sz="950"/>
-                      </a:pPr>
-                      <a:r>
-                        <a:rPr b="1" sz="950">
-                          <a:solidFill>
-                            <a:srgbClr val="C00000"/>
-                          </a:solidFill>
-                          <a:latin typeface="Aptos"/>
-                        </a:rPr>
-                        <a:t>(5,562,746.78)</a:t>
+                        <a:t>(5,571,717.00)</a:t>
                       </a:r>
                     </a:p>
                   </a:txBody>
@@ -19054,7 +18709,7 @@
         </p:nvSpPr>
         <p:spPr>
           <a:xfrm>
-            <a:off x="256032" y="4078224"/>
+            <a:off x="256032" y="3803904"/>
             <a:ext cx="11679631" cy="237744"/>
           </a:xfrm>
           <a:prstGeom prst="rect">
@@ -19083,7 +18738,7 @@
         </p:nvSpPr>
         <p:spPr>
           <a:xfrm>
-            <a:off x="292608" y="4078224"/>
+            <a:off x="292608" y="3803904"/>
             <a:ext cx="11679631" cy="237744"/>
           </a:xfrm>
           <a:prstGeom prst="rect">
@@ -19119,8 +18774,8 @@
           <p:nvPr/>
         </p:nvGraphicFramePr>
         <p:xfrm>
-          <a:off x="256032" y="4315968"/>
-          <a:ext cx="11676888" cy="1645920"/>
+          <a:off x="256032" y="4041648"/>
+          <a:ext cx="11676888" cy="1920240"/>
         </p:xfrm>
         <a:graphic>
           <a:graphicData uri="http://schemas.openxmlformats.org/drawingml/2006/table">
@@ -19743,7 +19398,7 @@
                           </a:solidFill>
                           <a:latin typeface="Aptos"/>
                         </a:rPr>
-                        <a:t>42.0%</a:t>
+                        <a:t>41.8%</a:t>
                       </a:r>
                     </a:p>
                   </a:txBody>
@@ -19843,7 +19498,7 @@
                           </a:solidFill>
                           <a:latin typeface="Aptos"/>
                         </a:rPr>
-                        <a:t>Repayment from related parties</a:t>
+                        <a:t>Interest received (Maybank pooled)</a:t>
                       </a:r>
                     </a:p>
                   </a:txBody>
@@ -19941,7 +19596,7 @@
                           </a:solidFill>
                           <a:latin typeface="Aptos"/>
                         </a:rPr>
-                        <a:t>210,691.35</a:t>
+                        <a:t>0.00</a:t>
                       </a:r>
                     </a:p>
                   </a:txBody>
@@ -19990,7 +19645,7 @@
                           </a:solidFill>
                           <a:latin typeface="Aptos"/>
                         </a:rPr>
-                        <a:t>8,189.42</a:t>
+                        <a:t>8,970.22</a:t>
                       </a:r>
                     </a:p>
                   </a:txBody>
@@ -20039,7 +19694,7 @@
                           </a:solidFill>
                           <a:latin typeface="Aptos"/>
                         </a:rPr>
-                        <a:t>218,880.77</a:t>
+                        <a:t>8,970.22</a:t>
                       </a:r>
                     </a:p>
                   </a:txBody>
@@ -20088,7 +19743,7 @@
                           </a:solidFill>
                           <a:latin typeface="Aptos"/>
                         </a:rPr>
-                        <a:t>9.7%</a:t>
+                        <a:t>0.4%</a:t>
                       </a:r>
                     </a:p>
                   </a:txBody>
@@ -20137,7 +19792,7 @@
                           </a:solidFill>
                           <a:latin typeface="Aptos"/>
                         </a:rPr>
-                        <a:t>Aug mainly Authentic RM210.6K; Sep TGCK RM8.2K</a:t>
+                        <a:t>Interest from Maybank pooled account (Sep)</a:t>
                       </a:r>
                     </a:p>
                   </a:txBody>
@@ -20188,7 +19843,7 @@
                           </a:solidFill>
                           <a:latin typeface="Aptos"/>
                         </a:rPr>
-                        <a:t>Repayment of loans</a:t>
+                        <a:t>Repayment from related parties</a:t>
                       </a:r>
                     </a:p>
                   </a:txBody>
@@ -20233,11 +19888,11 @@
                       <a:r>
                         <a:rPr b="1" sz="950">
                           <a:solidFill>
-                            <a:srgbClr val="C00000"/>
-                          </a:solidFill>
-                          <a:latin typeface="Aptos"/>
-                        </a:rPr>
-                        <a:t>(159,745.15)</a:t>
+                            <a:srgbClr val="0F172A"/>
+                          </a:solidFill>
+                          <a:latin typeface="Aptos"/>
+                        </a:rPr>
+                        <a:t>0.00</a:t>
                       </a:r>
                     </a:p>
                   </a:txBody>
@@ -20282,11 +19937,11 @@
                       <a:r>
                         <a:rPr b="1" sz="950">
                           <a:solidFill>
-                            <a:srgbClr val="C00000"/>
-                          </a:solidFill>
-                          <a:latin typeface="Aptos"/>
-                        </a:rPr>
-                        <a:t>(155,237.00)</a:t>
+                            <a:srgbClr val="0F172A"/>
+                          </a:solidFill>
+                          <a:latin typeface="Aptos"/>
+                        </a:rPr>
+                        <a:t>210,691.35</a:t>
                       </a:r>
                     </a:p>
                   </a:txBody>
@@ -20331,11 +19986,11 @@
                       <a:r>
                         <a:rPr b="1" sz="950">
                           <a:solidFill>
-                            <a:srgbClr val="C00000"/>
-                          </a:solidFill>
-                          <a:latin typeface="Aptos"/>
-                        </a:rPr>
-                        <a:t>(159,887.29)</a:t>
+                            <a:srgbClr val="0F172A"/>
+                          </a:solidFill>
+                          <a:latin typeface="Aptos"/>
+                        </a:rPr>
+                        <a:t>8,189.42</a:t>
                       </a:r>
                     </a:p>
                   </a:txBody>
@@ -20380,11 +20035,11 @@
                       <a:r>
                         <a:rPr b="1" sz="950">
                           <a:solidFill>
-                            <a:srgbClr val="C00000"/>
-                          </a:solidFill>
-                          <a:latin typeface="Aptos"/>
-                        </a:rPr>
-                        <a:t>(474,869.44)</a:t>
+                            <a:srgbClr val="0F172A"/>
+                          </a:solidFill>
+                          <a:latin typeface="Aptos"/>
+                        </a:rPr>
+                        <a:t>218,880.77</a:t>
                       </a:r>
                     </a:p>
                   </a:txBody>
@@ -20433,7 +20088,7 @@
                           </a:solidFill>
                           <a:latin typeface="Aptos"/>
                         </a:rPr>
-                        <a:t>21.0%</a:t>
+                        <a:t>9.6%</a:t>
                       </a:r>
                     </a:p>
                   </a:txBody>
@@ -20482,7 +20137,7 @@
                           </a:solidFill>
                           <a:latin typeface="Aptos"/>
                         </a:rPr>
-                        <a:t>Stable at about RM155K-RM160K monthly</a:t>
+                        <a:t>Aug mainly Authentic RM210.6K; Sep TGCK RM8.2K</a:t>
                       </a:r>
                     </a:p>
                   </a:txBody>
@@ -20533,7 +20188,7 @@
                           </a:solidFill>
                           <a:latin typeface="Aptos"/>
                         </a:rPr>
-                        <a:t>Advance to related parties</a:t>
+                        <a:t>Repayment of loans</a:t>
                       </a:r>
                     </a:p>
                   </a:txBody>
@@ -20582,7 +20237,7 @@
                           </a:solidFill>
                           <a:latin typeface="Aptos"/>
                         </a:rPr>
-                        <a:t>(417,714.58)</a:t>
+                        <a:t>(159,745.15)</a:t>
                       </a:r>
                     </a:p>
                   </a:txBody>
@@ -20631,7 +20286,7 @@
                           </a:solidFill>
                           <a:latin typeface="Aptos"/>
                         </a:rPr>
-                        <a:t>(417.93)</a:t>
+                        <a:t>(155,237.00)</a:t>
                       </a:r>
                     </a:p>
                   </a:txBody>
@@ -20680,7 +20335,7 @@
                           </a:solidFill>
                           <a:latin typeface="Aptos"/>
                         </a:rPr>
-                        <a:t>(201,003.06)</a:t>
+                        <a:t>(159,887.29)</a:t>
                       </a:r>
                     </a:p>
                   </a:txBody>
@@ -20729,7 +20384,7 @@
                           </a:solidFill>
                           <a:latin typeface="Aptos"/>
                         </a:rPr>
-                        <a:t>(619,135.57)</a:t>
+                        <a:t>(474,869.44)</a:t>
                       </a:r>
                     </a:p>
                   </a:txBody>
@@ -20778,7 +20433,7 @@
                           </a:solidFill>
                           <a:latin typeface="Aptos"/>
                         </a:rPr>
-                        <a:t>27.4%</a:t>
+                        <a:t>20.9%</a:t>
                       </a:r>
                     </a:p>
                   </a:txBody>
@@ -20827,7 +20482,7 @@
                           </a:solidFill>
                           <a:latin typeface="Aptos"/>
                         </a:rPr>
-                        <a:t>Jul: Bebeks 193.7K, Authentic 168.6K; Sep: Rindu Rasa 188.6K</a:t>
+                        <a:t>Stable at about RM155K-RM160K monthly</a:t>
                       </a:r>
                     </a:p>
                   </a:txBody>
@@ -20874,41 +20529,41 @@
                       <a:r>
                         <a:rPr b="1" sz="950">
                           <a:solidFill>
-                            <a:srgbClr val="FFFFFF"/>
-                          </a:solidFill>
-                          <a:latin typeface="Aptos"/>
-                        </a:rPr>
-                        <a:t>NET FINANCING ACTIVITIES</a:t>
-                      </a:r>
-                    </a:p>
-                  </a:txBody>
-                  <a:tcPr marL="45720" marR="45720" marT="0" marB="0" anchor="ctr">
-                    <a:lnL w="12700" cap="flat" cmpd="sng" algn="ctr">
-                      <a:solidFill>
-                        <a:srgbClr val="FFFFFF"/>
-                      </a:solidFill>
-                      <a:prstDash val="solid"/>
-                    </a:lnL>
-                    <a:lnR w="12700" cap="flat" cmpd="sng" algn="ctr">
-                      <a:solidFill>
-                        <a:srgbClr val="FFFFFF"/>
-                      </a:solidFill>
-                      <a:prstDash val="solid"/>
-                    </a:lnR>
-                    <a:lnT w="12700" cap="flat" cmpd="sng" algn="ctr">
-                      <a:solidFill>
-                        <a:srgbClr val="FFFFFF"/>
-                      </a:solidFill>
-                      <a:prstDash val="solid"/>
-                    </a:lnT>
-                    <a:lnB w="12700" cap="flat" cmpd="sng" algn="ctr">
-                      <a:solidFill>
-                        <a:srgbClr val="FFFFFF"/>
-                      </a:solidFill>
-                      <a:prstDash val="solid"/>
-                    </a:lnB>
-                    <a:solidFill>
-                      <a:srgbClr val="081E42"/>
+                            <a:srgbClr val="0F172A"/>
+                          </a:solidFill>
+                          <a:latin typeface="Aptos"/>
+                        </a:rPr>
+                        <a:t>Advance to related parties</a:t>
+                      </a:r>
+                    </a:p>
+                  </a:txBody>
+                  <a:tcPr marL="45720" marR="45720" marT="0" marB="0" anchor="ctr">
+                    <a:lnL w="12700" cap="flat" cmpd="sng" algn="ctr">
+                      <a:solidFill>
+                        <a:srgbClr val="FFFFFF"/>
+                      </a:solidFill>
+                      <a:prstDash val="solid"/>
+                    </a:lnL>
+                    <a:lnR w="12700" cap="flat" cmpd="sng" algn="ctr">
+                      <a:solidFill>
+                        <a:srgbClr val="FFFFFF"/>
+                      </a:solidFill>
+                      <a:prstDash val="solid"/>
+                    </a:lnR>
+                    <a:lnT w="12700" cap="flat" cmpd="sng" algn="ctr">
+                      <a:solidFill>
+                        <a:srgbClr val="FFFFFF"/>
+                      </a:solidFill>
+                      <a:prstDash val="solid"/>
+                    </a:lnT>
+                    <a:lnB w="12700" cap="flat" cmpd="sng" algn="ctr">
+                      <a:solidFill>
+                        <a:srgbClr val="FFFFFF"/>
+                      </a:solidFill>
+                      <a:prstDash val="solid"/>
+                    </a:lnB>
+                    <a:solidFill>
+                      <a:srgbClr val="FFF2B3"/>
                     </a:solidFill>
                   </a:tcPr>
                 </a:tc>
@@ -20923,41 +20578,41 @@
                       <a:r>
                         <a:rPr b="1" sz="950">
                           <a:solidFill>
-                            <a:srgbClr val="0F172A"/>
-                          </a:solidFill>
-                          <a:latin typeface="Aptos"/>
-                        </a:rPr>
-                        <a:t>142,540.27</a:t>
-                      </a:r>
-                    </a:p>
-                  </a:txBody>
-                  <a:tcPr marL="45720" marR="45720" marT="0" marB="0" anchor="ctr">
-                    <a:lnL w="12700" cap="flat" cmpd="sng" algn="ctr">
-                      <a:solidFill>
-                        <a:srgbClr val="FFFFFF"/>
-                      </a:solidFill>
-                      <a:prstDash val="solid"/>
-                    </a:lnL>
-                    <a:lnR w="12700" cap="flat" cmpd="sng" algn="ctr">
-                      <a:solidFill>
-                        <a:srgbClr val="FFFFFF"/>
-                      </a:solidFill>
-                      <a:prstDash val="solid"/>
-                    </a:lnR>
-                    <a:lnT w="12700" cap="flat" cmpd="sng" algn="ctr">
-                      <a:solidFill>
-                        <a:srgbClr val="FFFFFF"/>
-                      </a:solidFill>
-                      <a:prstDash val="solid"/>
-                    </a:lnT>
-                    <a:lnB w="12700" cap="flat" cmpd="sng" algn="ctr">
-                      <a:solidFill>
-                        <a:srgbClr val="FFFFFF"/>
-                      </a:solidFill>
-                      <a:prstDash val="solid"/>
-                    </a:lnB>
-                    <a:solidFill>
-                      <a:srgbClr val="FFC20E"/>
+                            <a:srgbClr val="C00000"/>
+                          </a:solidFill>
+                          <a:latin typeface="Aptos"/>
+                        </a:rPr>
+                        <a:t>(417,714.58)</a:t>
+                      </a:r>
+                    </a:p>
+                  </a:txBody>
+                  <a:tcPr marL="45720" marR="45720" marT="0" marB="0" anchor="ctr">
+                    <a:lnL w="12700" cap="flat" cmpd="sng" algn="ctr">
+                      <a:solidFill>
+                        <a:srgbClr val="FFFFFF"/>
+                      </a:solidFill>
+                      <a:prstDash val="solid"/>
+                    </a:lnL>
+                    <a:lnR w="12700" cap="flat" cmpd="sng" algn="ctr">
+                      <a:solidFill>
+                        <a:srgbClr val="FFFFFF"/>
+                      </a:solidFill>
+                      <a:prstDash val="solid"/>
+                    </a:lnR>
+                    <a:lnT w="12700" cap="flat" cmpd="sng" algn="ctr">
+                      <a:solidFill>
+                        <a:srgbClr val="FFFFFF"/>
+                      </a:solidFill>
+                      <a:prstDash val="solid"/>
+                    </a:lnT>
+                    <a:lnB w="12700" cap="flat" cmpd="sng" algn="ctr">
+                      <a:solidFill>
+                        <a:srgbClr val="FFFFFF"/>
+                      </a:solidFill>
+                      <a:prstDash val="solid"/>
+                    </a:lnB>
+                    <a:solidFill>
+                      <a:srgbClr val="F8FAFC"/>
                     </a:solidFill>
                   </a:tcPr>
                 </a:tc>
@@ -20972,41 +20627,41 @@
                       <a:r>
                         <a:rPr b="1" sz="950">
                           <a:solidFill>
-                            <a:srgbClr val="0F172A"/>
-                          </a:solidFill>
-                          <a:latin typeface="Aptos"/>
-                        </a:rPr>
-                        <a:t>55,036.42</a:t>
-                      </a:r>
-                    </a:p>
-                  </a:txBody>
-                  <a:tcPr marL="45720" marR="45720" marT="0" marB="0" anchor="ctr">
-                    <a:lnL w="12700" cap="flat" cmpd="sng" algn="ctr">
-                      <a:solidFill>
-                        <a:srgbClr val="FFFFFF"/>
-                      </a:solidFill>
-                      <a:prstDash val="solid"/>
-                    </a:lnL>
-                    <a:lnR w="12700" cap="flat" cmpd="sng" algn="ctr">
-                      <a:solidFill>
-                        <a:srgbClr val="FFFFFF"/>
-                      </a:solidFill>
-                      <a:prstDash val="solid"/>
-                    </a:lnR>
-                    <a:lnT w="12700" cap="flat" cmpd="sng" algn="ctr">
-                      <a:solidFill>
-                        <a:srgbClr val="FFFFFF"/>
-                      </a:solidFill>
-                      <a:prstDash val="solid"/>
-                    </a:lnT>
-                    <a:lnB w="12700" cap="flat" cmpd="sng" algn="ctr">
-                      <a:solidFill>
-                        <a:srgbClr val="FFFFFF"/>
-                      </a:solidFill>
-                      <a:prstDash val="solid"/>
-                    </a:lnB>
-                    <a:solidFill>
-                      <a:srgbClr val="FFC20E"/>
+                            <a:srgbClr val="C00000"/>
+                          </a:solidFill>
+                          <a:latin typeface="Aptos"/>
+                        </a:rPr>
+                        <a:t>(417.93)</a:t>
+                      </a:r>
+                    </a:p>
+                  </a:txBody>
+                  <a:tcPr marL="45720" marR="45720" marT="0" marB="0" anchor="ctr">
+                    <a:lnL w="12700" cap="flat" cmpd="sng" algn="ctr">
+                      <a:solidFill>
+                        <a:srgbClr val="FFFFFF"/>
+                      </a:solidFill>
+                      <a:prstDash val="solid"/>
+                    </a:lnL>
+                    <a:lnR w="12700" cap="flat" cmpd="sng" algn="ctr">
+                      <a:solidFill>
+                        <a:srgbClr val="FFFFFF"/>
+                      </a:solidFill>
+                      <a:prstDash val="solid"/>
+                    </a:lnR>
+                    <a:lnT w="12700" cap="flat" cmpd="sng" algn="ctr">
+                      <a:solidFill>
+                        <a:srgbClr val="FFFFFF"/>
+                      </a:solidFill>
+                      <a:prstDash val="solid"/>
+                    </a:lnT>
+                    <a:lnB w="12700" cap="flat" cmpd="sng" algn="ctr">
+                      <a:solidFill>
+                        <a:srgbClr val="FFFFFF"/>
+                      </a:solidFill>
+                      <a:prstDash val="solid"/>
+                    </a:lnB>
+                    <a:solidFill>
+                      <a:srgbClr val="FFFFFF"/>
                     </a:solidFill>
                   </a:tcPr>
                 </a:tc>
@@ -21025,37 +20680,37 @@
                           </a:solidFill>
                           <a:latin typeface="Aptos"/>
                         </a:rPr>
-                        <a:t>(123,700.93)</a:t>
-                      </a:r>
-                    </a:p>
-                  </a:txBody>
-                  <a:tcPr marL="45720" marR="45720" marT="0" marB="0" anchor="ctr">
-                    <a:lnL w="12700" cap="flat" cmpd="sng" algn="ctr">
-                      <a:solidFill>
-                        <a:srgbClr val="FFFFFF"/>
-                      </a:solidFill>
-                      <a:prstDash val="solid"/>
-                    </a:lnL>
-                    <a:lnR w="12700" cap="flat" cmpd="sng" algn="ctr">
-                      <a:solidFill>
-                        <a:srgbClr val="FFFFFF"/>
-                      </a:solidFill>
-                      <a:prstDash val="solid"/>
-                    </a:lnR>
-                    <a:lnT w="12700" cap="flat" cmpd="sng" algn="ctr">
-                      <a:solidFill>
-                        <a:srgbClr val="FFFFFF"/>
-                      </a:solidFill>
-                      <a:prstDash val="solid"/>
-                    </a:lnT>
-                    <a:lnB w="12700" cap="flat" cmpd="sng" algn="ctr">
-                      <a:solidFill>
-                        <a:srgbClr val="FFFFFF"/>
-                      </a:solidFill>
-                      <a:prstDash val="solid"/>
-                    </a:lnB>
-                    <a:solidFill>
-                      <a:srgbClr val="FFC20E"/>
+                        <a:t>(201,003.06)</a:t>
+                      </a:r>
+                    </a:p>
+                  </a:txBody>
+                  <a:tcPr marL="45720" marR="45720" marT="0" marB="0" anchor="ctr">
+                    <a:lnL w="12700" cap="flat" cmpd="sng" algn="ctr">
+                      <a:solidFill>
+                        <a:srgbClr val="FFFFFF"/>
+                      </a:solidFill>
+                      <a:prstDash val="solid"/>
+                    </a:lnL>
+                    <a:lnR w="12700" cap="flat" cmpd="sng" algn="ctr">
+                      <a:solidFill>
+                        <a:srgbClr val="FFFFFF"/>
+                      </a:solidFill>
+                      <a:prstDash val="solid"/>
+                    </a:lnR>
+                    <a:lnT w="12700" cap="flat" cmpd="sng" algn="ctr">
+                      <a:solidFill>
+                        <a:srgbClr val="FFFFFF"/>
+                      </a:solidFill>
+                      <a:prstDash val="solid"/>
+                    </a:lnT>
+                    <a:lnB w="12700" cap="flat" cmpd="sng" algn="ctr">
+                      <a:solidFill>
+                        <a:srgbClr val="FFFFFF"/>
+                      </a:solidFill>
+                      <a:prstDash val="solid"/>
+                    </a:lnB>
+                    <a:solidFill>
+                      <a:srgbClr val="F8FAFC"/>
                     </a:solidFill>
                   </a:tcPr>
                 </a:tc>
@@ -21070,11 +20725,356 @@
                       <a:r>
                         <a:rPr b="1" sz="950">
                           <a:solidFill>
-                            <a:srgbClr val="0F172A"/>
-                          </a:solidFill>
-                          <a:latin typeface="Aptos"/>
-                        </a:rPr>
-                        <a:t>73,875.76</a:t>
+                            <a:srgbClr val="C00000"/>
+                          </a:solidFill>
+                          <a:latin typeface="Aptos"/>
+                        </a:rPr>
+                        <a:t>(619,135.57)</a:t>
+                      </a:r>
+                    </a:p>
+                  </a:txBody>
+                  <a:tcPr marL="45720" marR="45720" marT="0" marB="0" anchor="ctr">
+                    <a:lnL w="12700" cap="flat" cmpd="sng" algn="ctr">
+                      <a:solidFill>
+                        <a:srgbClr val="FFFFFF"/>
+                      </a:solidFill>
+                      <a:prstDash val="solid"/>
+                    </a:lnL>
+                    <a:lnR w="12700" cap="flat" cmpd="sng" algn="ctr">
+                      <a:solidFill>
+                        <a:srgbClr val="FFFFFF"/>
+                      </a:solidFill>
+                      <a:prstDash val="solid"/>
+                    </a:lnR>
+                    <a:lnT w="12700" cap="flat" cmpd="sng" algn="ctr">
+                      <a:solidFill>
+                        <a:srgbClr val="FFFFFF"/>
+                      </a:solidFill>
+                      <a:prstDash val="solid"/>
+                    </a:lnT>
+                    <a:lnB w="12700" cap="flat" cmpd="sng" algn="ctr">
+                      <a:solidFill>
+                        <a:srgbClr val="FFFFFF"/>
+                      </a:solidFill>
+                      <a:prstDash val="solid"/>
+                    </a:lnB>
+                    <a:solidFill>
+                      <a:srgbClr val="FFFFFF"/>
+                    </a:solidFill>
+                  </a:tcPr>
+                </a:tc>
+                <a:tc>
+                  <a:txBody>
+                    <a:bodyPr wrap="square"/>
+                    <a:lstStyle/>
+                    <a:p>
+                      <a:pPr algn="ctr">
+                        <a:defRPr sz="950"/>
+                      </a:pPr>
+                      <a:r>
+                        <a:rPr b="1" sz="950">
+                          <a:solidFill>
+                            <a:srgbClr val="0F172A"/>
+                          </a:solidFill>
+                          <a:latin typeface="Aptos"/>
+                        </a:rPr>
+                        <a:t>27.3%</a:t>
+                      </a:r>
+                    </a:p>
+                  </a:txBody>
+                  <a:tcPr marL="45720" marR="45720" marT="0" marB="0" anchor="ctr">
+                    <a:lnL w="12700" cap="flat" cmpd="sng" algn="ctr">
+                      <a:solidFill>
+                        <a:srgbClr val="FFFFFF"/>
+                      </a:solidFill>
+                      <a:prstDash val="solid"/>
+                    </a:lnL>
+                    <a:lnR w="12700" cap="flat" cmpd="sng" algn="ctr">
+                      <a:solidFill>
+                        <a:srgbClr val="FFFFFF"/>
+                      </a:solidFill>
+                      <a:prstDash val="solid"/>
+                    </a:lnR>
+                    <a:lnT w="12700" cap="flat" cmpd="sng" algn="ctr">
+                      <a:solidFill>
+                        <a:srgbClr val="FFFFFF"/>
+                      </a:solidFill>
+                      <a:prstDash val="solid"/>
+                    </a:lnT>
+                    <a:lnB w="12700" cap="flat" cmpd="sng" algn="ctr">
+                      <a:solidFill>
+                        <a:srgbClr val="FFFFFF"/>
+                      </a:solidFill>
+                      <a:prstDash val="solid"/>
+                    </a:lnB>
+                    <a:solidFill>
+                      <a:srgbClr val="DDF0F8"/>
+                    </a:solidFill>
+                  </a:tcPr>
+                </a:tc>
+                <a:tc>
+                  <a:txBody>
+                    <a:bodyPr wrap="square"/>
+                    <a:lstStyle/>
+                    <a:p>
+                      <a:pPr algn="l">
+                        <a:defRPr sz="950"/>
+                      </a:pPr>
+                      <a:r>
+                        <a:rPr b="1" sz="950">
+                          <a:solidFill>
+                            <a:srgbClr val="0F172A"/>
+                          </a:solidFill>
+                          <a:latin typeface="Aptos"/>
+                        </a:rPr>
+                        <a:t>Jul: Bebeks 193.7K, Authentic 168.6K; Sep: Rindu Rasa 188.6K</a:t>
+                      </a:r>
+                    </a:p>
+                  </a:txBody>
+                  <a:tcPr marL="45720" marR="45720" marT="0" marB="0" anchor="ctr">
+                    <a:lnL w="12700" cap="flat" cmpd="sng" algn="ctr">
+                      <a:solidFill>
+                        <a:srgbClr val="FFFFFF"/>
+                      </a:solidFill>
+                      <a:prstDash val="solid"/>
+                    </a:lnL>
+                    <a:lnR w="12700" cap="flat" cmpd="sng" algn="ctr">
+                      <a:solidFill>
+                        <a:srgbClr val="FFFFFF"/>
+                      </a:solidFill>
+                      <a:prstDash val="solid"/>
+                    </a:lnR>
+                    <a:lnT w="12700" cap="flat" cmpd="sng" algn="ctr">
+                      <a:solidFill>
+                        <a:srgbClr val="FFFFFF"/>
+                      </a:solidFill>
+                      <a:prstDash val="solid"/>
+                    </a:lnT>
+                    <a:lnB w="12700" cap="flat" cmpd="sng" algn="ctr">
+                      <a:solidFill>
+                        <a:srgbClr val="FFFFFF"/>
+                      </a:solidFill>
+                      <a:prstDash val="solid"/>
+                    </a:lnB>
+                    <a:solidFill>
+                      <a:srgbClr val="FFFFFF"/>
+                    </a:solidFill>
+                  </a:tcPr>
+                </a:tc>
+              </a:tr>
+              <a:tr h="274320">
+                <a:tc>
+                  <a:txBody>
+                    <a:bodyPr wrap="square"/>
+                    <a:lstStyle/>
+                    <a:p>
+                      <a:pPr algn="l">
+                        <a:defRPr sz="950"/>
+                      </a:pPr>
+                      <a:r>
+                        <a:rPr b="1" sz="950">
+                          <a:solidFill>
+                            <a:srgbClr val="FFFFFF"/>
+                          </a:solidFill>
+                          <a:latin typeface="Aptos"/>
+                        </a:rPr>
+                        <a:t>NET FINANCING ACTIVITIES</a:t>
+                      </a:r>
+                    </a:p>
+                  </a:txBody>
+                  <a:tcPr marL="45720" marR="45720" marT="0" marB="0" anchor="ctr">
+                    <a:lnL w="12700" cap="flat" cmpd="sng" algn="ctr">
+                      <a:solidFill>
+                        <a:srgbClr val="FFFFFF"/>
+                      </a:solidFill>
+                      <a:prstDash val="solid"/>
+                    </a:lnL>
+                    <a:lnR w="12700" cap="flat" cmpd="sng" algn="ctr">
+                      <a:solidFill>
+                        <a:srgbClr val="FFFFFF"/>
+                      </a:solidFill>
+                      <a:prstDash val="solid"/>
+                    </a:lnR>
+                    <a:lnT w="12700" cap="flat" cmpd="sng" algn="ctr">
+                      <a:solidFill>
+                        <a:srgbClr val="FFFFFF"/>
+                      </a:solidFill>
+                      <a:prstDash val="solid"/>
+                    </a:lnT>
+                    <a:lnB w="12700" cap="flat" cmpd="sng" algn="ctr">
+                      <a:solidFill>
+                        <a:srgbClr val="FFFFFF"/>
+                      </a:solidFill>
+                      <a:prstDash val="solid"/>
+                    </a:lnB>
+                    <a:solidFill>
+                      <a:srgbClr val="081E42"/>
+                    </a:solidFill>
+                  </a:tcPr>
+                </a:tc>
+                <a:tc>
+                  <a:txBody>
+                    <a:bodyPr wrap="square"/>
+                    <a:lstStyle/>
+                    <a:p>
+                      <a:pPr algn="r">
+                        <a:defRPr sz="950"/>
+                      </a:pPr>
+                      <a:r>
+                        <a:rPr b="1" sz="950">
+                          <a:solidFill>
+                            <a:srgbClr val="0F172A"/>
+                          </a:solidFill>
+                          <a:latin typeface="Aptos"/>
+                        </a:rPr>
+                        <a:t>142,540.27</a:t>
+                      </a:r>
+                    </a:p>
+                  </a:txBody>
+                  <a:tcPr marL="45720" marR="45720" marT="0" marB="0" anchor="ctr">
+                    <a:lnL w="12700" cap="flat" cmpd="sng" algn="ctr">
+                      <a:solidFill>
+                        <a:srgbClr val="FFFFFF"/>
+                      </a:solidFill>
+                      <a:prstDash val="solid"/>
+                    </a:lnL>
+                    <a:lnR w="12700" cap="flat" cmpd="sng" algn="ctr">
+                      <a:solidFill>
+                        <a:srgbClr val="FFFFFF"/>
+                      </a:solidFill>
+                      <a:prstDash val="solid"/>
+                    </a:lnR>
+                    <a:lnT w="12700" cap="flat" cmpd="sng" algn="ctr">
+                      <a:solidFill>
+                        <a:srgbClr val="FFFFFF"/>
+                      </a:solidFill>
+                      <a:prstDash val="solid"/>
+                    </a:lnT>
+                    <a:lnB w="12700" cap="flat" cmpd="sng" algn="ctr">
+                      <a:solidFill>
+                        <a:srgbClr val="FFFFFF"/>
+                      </a:solidFill>
+                      <a:prstDash val="solid"/>
+                    </a:lnB>
+                    <a:solidFill>
+                      <a:srgbClr val="FFC20E"/>
+                    </a:solidFill>
+                  </a:tcPr>
+                </a:tc>
+                <a:tc>
+                  <a:txBody>
+                    <a:bodyPr wrap="square"/>
+                    <a:lstStyle/>
+                    <a:p>
+                      <a:pPr algn="r">
+                        <a:defRPr sz="950"/>
+                      </a:pPr>
+                      <a:r>
+                        <a:rPr b="1" sz="950">
+                          <a:solidFill>
+                            <a:srgbClr val="0F172A"/>
+                          </a:solidFill>
+                          <a:latin typeface="Aptos"/>
+                        </a:rPr>
+                        <a:t>55,036.42</a:t>
+                      </a:r>
+                    </a:p>
+                  </a:txBody>
+                  <a:tcPr marL="45720" marR="45720" marT="0" marB="0" anchor="ctr">
+                    <a:lnL w="12700" cap="flat" cmpd="sng" algn="ctr">
+                      <a:solidFill>
+                        <a:srgbClr val="FFFFFF"/>
+                      </a:solidFill>
+                      <a:prstDash val="solid"/>
+                    </a:lnL>
+                    <a:lnR w="12700" cap="flat" cmpd="sng" algn="ctr">
+                      <a:solidFill>
+                        <a:srgbClr val="FFFFFF"/>
+                      </a:solidFill>
+                      <a:prstDash val="solid"/>
+                    </a:lnR>
+                    <a:lnT w="12700" cap="flat" cmpd="sng" algn="ctr">
+                      <a:solidFill>
+                        <a:srgbClr val="FFFFFF"/>
+                      </a:solidFill>
+                      <a:prstDash val="solid"/>
+                    </a:lnT>
+                    <a:lnB w="12700" cap="flat" cmpd="sng" algn="ctr">
+                      <a:solidFill>
+                        <a:srgbClr val="FFFFFF"/>
+                      </a:solidFill>
+                      <a:prstDash val="solid"/>
+                    </a:lnB>
+                    <a:solidFill>
+                      <a:srgbClr val="FFC20E"/>
+                    </a:solidFill>
+                  </a:tcPr>
+                </a:tc>
+                <a:tc>
+                  <a:txBody>
+                    <a:bodyPr wrap="square"/>
+                    <a:lstStyle/>
+                    <a:p>
+                      <a:pPr algn="r">
+                        <a:defRPr sz="950"/>
+                      </a:pPr>
+                      <a:r>
+                        <a:rPr b="1" sz="950">
+                          <a:solidFill>
+                            <a:srgbClr val="C00000"/>
+                          </a:solidFill>
+                          <a:latin typeface="Aptos"/>
+                        </a:rPr>
+                        <a:t>(114,730.71)</a:t>
+                      </a:r>
+                    </a:p>
+                  </a:txBody>
+                  <a:tcPr marL="45720" marR="45720" marT="0" marB="0" anchor="ctr">
+                    <a:lnL w="12700" cap="flat" cmpd="sng" algn="ctr">
+                      <a:solidFill>
+                        <a:srgbClr val="FFFFFF"/>
+                      </a:solidFill>
+                      <a:prstDash val="solid"/>
+                    </a:lnL>
+                    <a:lnR w="12700" cap="flat" cmpd="sng" algn="ctr">
+                      <a:solidFill>
+                        <a:srgbClr val="FFFFFF"/>
+                      </a:solidFill>
+                      <a:prstDash val="solid"/>
+                    </a:lnR>
+                    <a:lnT w="12700" cap="flat" cmpd="sng" algn="ctr">
+                      <a:solidFill>
+                        <a:srgbClr val="FFFFFF"/>
+                      </a:solidFill>
+                      <a:prstDash val="solid"/>
+                    </a:lnT>
+                    <a:lnB w="12700" cap="flat" cmpd="sng" algn="ctr">
+                      <a:solidFill>
+                        <a:srgbClr val="FFFFFF"/>
+                      </a:solidFill>
+                      <a:prstDash val="solid"/>
+                    </a:lnB>
+                    <a:solidFill>
+                      <a:srgbClr val="FFC20E"/>
+                    </a:solidFill>
+                  </a:tcPr>
+                </a:tc>
+                <a:tc>
+                  <a:txBody>
+                    <a:bodyPr wrap="square"/>
+                    <a:lstStyle/>
+                    <a:p>
+                      <a:pPr algn="r">
+                        <a:defRPr sz="950"/>
+                      </a:pPr>
+                      <a:r>
+                        <a:rPr b="1" sz="950">
+                          <a:solidFill>
+                            <a:srgbClr val="0F172A"/>
+                          </a:solidFill>
+                          <a:latin typeface="Aptos"/>
+                        </a:rPr>
+                        <a:t>82,845.98</a:t>
                       </a:r>
                     </a:p>
                   </a:txBody>

--- a/q3-finance-report/Q3_2026_Finance_Report.pptx
+++ b/q3-finance-report/Q3_2026_Finance_Report.pptx
@@ -3330,7 +3330,7 @@
                 </a:solidFill>
                 <a:latin typeface="Aptos"/>
               </a:rPr>
-              <a:t>Source: TGFB Cash Flow Statement PDFs for July, August and September 2026 (latest revised upload). Sep interest received (RM8,970.22) shown under financing; statement shows it under investing.</a:t>
+              <a:t>Source: TGFB Cash Flow Statement PDFs for July, August and September 2026 (latest revised upload). Adjusted from statements: Sep interest received (RM8,970.22) shown under financing instead of investing; Jul Bebeks (RM193,746.06) shown as repayment to related parties instead of advance.</a:t>
             </a:r>
           </a:p>
         </p:txBody>
@@ -6658,7 +6658,7 @@
                 </a:solidFill>
                 <a:latin typeface="Aptos"/>
               </a:rPr>
-              <a:t>Source: TGFB Cash Flow Statement PDFs for July, August and September 2026 (latest revised upload). Sep interest received (RM8,970.22) shown under financing; statement shows it under investing.</a:t>
+              <a:t>Source: TGFB Cash Flow Statement PDFs for July, August and September 2026 (latest revised upload). Adjusted from statements: Sep interest received (RM8,970.22) shown under financing instead of investing; Jul Bebeks (RM193,746.06) shown as repayment to related parties instead of advance.</a:t>
             </a:r>
           </a:p>
         </p:txBody>
@@ -9199,7 +9199,7 @@
                 </a:solidFill>
                 <a:latin typeface="Aptos"/>
               </a:rPr>
-              <a:t>Source: TGFB Cash Flow Statement PDFs for July, August and September 2026 (latest revised upload). Sep interest received (RM8,970.22) shown under financing; statement shows it under investing.</a:t>
+              <a:t>Source: TGFB Cash Flow Statement PDFs for July, August and September 2026 (latest revised upload). Adjusted from statements: Sep interest received (RM8,970.22) shown under financing instead of investing; Jul Bebeks (RM193,746.06) shown as repayment to related parties instead of advance.</a:t>
             </a:r>
           </a:p>
         </p:txBody>
@@ -16186,7 +16186,7 @@
                 </a:solidFill>
                 <a:latin typeface="Aptos"/>
               </a:rPr>
-              <a:t>Source: TGFB Cash Flow Statement PDFs for July, August and September 2026 (latest revised upload). Sep interest received (RM8,970.22) shown under financing; statement shows it under investing.</a:t>
+              <a:t>Source: TGFB Cash Flow Statement PDFs for July, August and September 2026 (latest revised upload). Adjusted from statements: Sep interest received (RM8,970.22) shown under financing instead of investing; Jul Bebeks (RM193,746.06) shown as repayment to related parties instead of advance.</a:t>
             </a:r>
           </a:p>
         </p:txBody>
@@ -18775,7 +18775,7 @@
         </p:nvGraphicFramePr>
         <p:xfrm>
           <a:off x="256032" y="4041648"/>
-          <a:ext cx="11676888" cy="1920240"/>
+          <a:ext cx="11676888" cy="2194560"/>
         </p:xfrm>
         <a:graphic>
           <a:graphicData uri="http://schemas.openxmlformats.org/drawingml/2006/table">
@@ -20582,7 +20582,7 @@
                           </a:solidFill>
                           <a:latin typeface="Aptos"/>
                         </a:rPr>
-                        <a:t>(417,714.58)</a:t>
+                        <a:t>(223,968.52)</a:t>
                       </a:r>
                     </a:p>
                   </a:txBody>
@@ -20729,7 +20729,7 @@
                           </a:solidFill>
                           <a:latin typeface="Aptos"/>
                         </a:rPr>
-                        <a:t>(619,135.57)</a:t>
+                        <a:t>(425,389.51)</a:t>
                       </a:r>
                     </a:p>
                   </a:txBody>
@@ -20778,7 +20778,7 @@
                           </a:solidFill>
                           <a:latin typeface="Aptos"/>
                         </a:rPr>
-                        <a:t>27.3%</a:t>
+                        <a:t>18.7%</a:t>
                       </a:r>
                     </a:p>
                   </a:txBody>
@@ -20827,7 +20827,352 @@
                           </a:solidFill>
                           <a:latin typeface="Aptos"/>
                         </a:rPr>
-                        <a:t>Jul: Bebeks 193.7K, Authentic 168.6K; Sep: Rindu Rasa 188.6K</a:t>
+                        <a:t>Jul: Authentic 168.6K, TGL 27.9K; Sep: Rindu Rasa 188.6K</a:t>
+                      </a:r>
+                    </a:p>
+                  </a:txBody>
+                  <a:tcPr marL="45720" marR="45720" marT="0" marB="0" anchor="ctr">
+                    <a:lnL w="12700" cap="flat" cmpd="sng" algn="ctr">
+                      <a:solidFill>
+                        <a:srgbClr val="FFFFFF"/>
+                      </a:solidFill>
+                      <a:prstDash val="solid"/>
+                    </a:lnL>
+                    <a:lnR w="12700" cap="flat" cmpd="sng" algn="ctr">
+                      <a:solidFill>
+                        <a:srgbClr val="FFFFFF"/>
+                      </a:solidFill>
+                      <a:prstDash val="solid"/>
+                    </a:lnR>
+                    <a:lnT w="12700" cap="flat" cmpd="sng" algn="ctr">
+                      <a:solidFill>
+                        <a:srgbClr val="FFFFFF"/>
+                      </a:solidFill>
+                      <a:prstDash val="solid"/>
+                    </a:lnT>
+                    <a:lnB w="12700" cap="flat" cmpd="sng" algn="ctr">
+                      <a:solidFill>
+                        <a:srgbClr val="FFFFFF"/>
+                      </a:solidFill>
+                      <a:prstDash val="solid"/>
+                    </a:lnB>
+                    <a:solidFill>
+                      <a:srgbClr val="FFFFFF"/>
+                    </a:solidFill>
+                  </a:tcPr>
+                </a:tc>
+              </a:tr>
+              <a:tr h="274320">
+                <a:tc>
+                  <a:txBody>
+                    <a:bodyPr wrap="square"/>
+                    <a:lstStyle/>
+                    <a:p>
+                      <a:pPr algn="l">
+                        <a:defRPr sz="950"/>
+                      </a:pPr>
+                      <a:r>
+                        <a:rPr b="1" sz="950">
+                          <a:solidFill>
+                            <a:srgbClr val="0F172A"/>
+                          </a:solidFill>
+                          <a:latin typeface="Aptos"/>
+                        </a:rPr>
+                        <a:t>Repayment to related parties</a:t>
+                      </a:r>
+                    </a:p>
+                  </a:txBody>
+                  <a:tcPr marL="45720" marR="45720" marT="0" marB="0" anchor="ctr">
+                    <a:lnL w="12700" cap="flat" cmpd="sng" algn="ctr">
+                      <a:solidFill>
+                        <a:srgbClr val="FFFFFF"/>
+                      </a:solidFill>
+                      <a:prstDash val="solid"/>
+                    </a:lnL>
+                    <a:lnR w="12700" cap="flat" cmpd="sng" algn="ctr">
+                      <a:solidFill>
+                        <a:srgbClr val="FFFFFF"/>
+                      </a:solidFill>
+                      <a:prstDash val="solid"/>
+                    </a:lnR>
+                    <a:lnT w="12700" cap="flat" cmpd="sng" algn="ctr">
+                      <a:solidFill>
+                        <a:srgbClr val="FFFFFF"/>
+                      </a:solidFill>
+                      <a:prstDash val="solid"/>
+                    </a:lnT>
+                    <a:lnB w="12700" cap="flat" cmpd="sng" algn="ctr">
+                      <a:solidFill>
+                        <a:srgbClr val="FFFFFF"/>
+                      </a:solidFill>
+                      <a:prstDash val="solid"/>
+                    </a:lnB>
+                    <a:solidFill>
+                      <a:srgbClr val="FFF2B3"/>
+                    </a:solidFill>
+                  </a:tcPr>
+                </a:tc>
+                <a:tc>
+                  <a:txBody>
+                    <a:bodyPr wrap="square"/>
+                    <a:lstStyle/>
+                    <a:p>
+                      <a:pPr algn="r">
+                        <a:defRPr sz="950"/>
+                      </a:pPr>
+                      <a:r>
+                        <a:rPr b="1" sz="950">
+                          <a:solidFill>
+                            <a:srgbClr val="C00000"/>
+                          </a:solidFill>
+                          <a:latin typeface="Aptos"/>
+                        </a:rPr>
+                        <a:t>(193,746.06)</a:t>
+                      </a:r>
+                    </a:p>
+                  </a:txBody>
+                  <a:tcPr marL="45720" marR="45720" marT="0" marB="0" anchor="ctr">
+                    <a:lnL w="12700" cap="flat" cmpd="sng" algn="ctr">
+                      <a:solidFill>
+                        <a:srgbClr val="FFFFFF"/>
+                      </a:solidFill>
+                      <a:prstDash val="solid"/>
+                    </a:lnL>
+                    <a:lnR w="12700" cap="flat" cmpd="sng" algn="ctr">
+                      <a:solidFill>
+                        <a:srgbClr val="FFFFFF"/>
+                      </a:solidFill>
+                      <a:prstDash val="solid"/>
+                    </a:lnR>
+                    <a:lnT w="12700" cap="flat" cmpd="sng" algn="ctr">
+                      <a:solidFill>
+                        <a:srgbClr val="FFFFFF"/>
+                      </a:solidFill>
+                      <a:prstDash val="solid"/>
+                    </a:lnT>
+                    <a:lnB w="12700" cap="flat" cmpd="sng" algn="ctr">
+                      <a:solidFill>
+                        <a:srgbClr val="FFFFFF"/>
+                      </a:solidFill>
+                      <a:prstDash val="solid"/>
+                    </a:lnB>
+                    <a:solidFill>
+                      <a:srgbClr val="F8FAFC"/>
+                    </a:solidFill>
+                  </a:tcPr>
+                </a:tc>
+                <a:tc>
+                  <a:txBody>
+                    <a:bodyPr wrap="square"/>
+                    <a:lstStyle/>
+                    <a:p>
+                      <a:pPr algn="r">
+                        <a:defRPr sz="950"/>
+                      </a:pPr>
+                      <a:r>
+                        <a:rPr b="1" sz="950">
+                          <a:solidFill>
+                            <a:srgbClr val="0F172A"/>
+                          </a:solidFill>
+                          <a:latin typeface="Aptos"/>
+                        </a:rPr>
+                        <a:t>0.00</a:t>
+                      </a:r>
+                    </a:p>
+                  </a:txBody>
+                  <a:tcPr marL="45720" marR="45720" marT="0" marB="0" anchor="ctr">
+                    <a:lnL w="12700" cap="flat" cmpd="sng" algn="ctr">
+                      <a:solidFill>
+                        <a:srgbClr val="FFFFFF"/>
+                      </a:solidFill>
+                      <a:prstDash val="solid"/>
+                    </a:lnL>
+                    <a:lnR w="12700" cap="flat" cmpd="sng" algn="ctr">
+                      <a:solidFill>
+                        <a:srgbClr val="FFFFFF"/>
+                      </a:solidFill>
+                      <a:prstDash val="solid"/>
+                    </a:lnR>
+                    <a:lnT w="12700" cap="flat" cmpd="sng" algn="ctr">
+                      <a:solidFill>
+                        <a:srgbClr val="FFFFFF"/>
+                      </a:solidFill>
+                      <a:prstDash val="solid"/>
+                    </a:lnT>
+                    <a:lnB w="12700" cap="flat" cmpd="sng" algn="ctr">
+                      <a:solidFill>
+                        <a:srgbClr val="FFFFFF"/>
+                      </a:solidFill>
+                      <a:prstDash val="solid"/>
+                    </a:lnB>
+                    <a:solidFill>
+                      <a:srgbClr val="FFFFFF"/>
+                    </a:solidFill>
+                  </a:tcPr>
+                </a:tc>
+                <a:tc>
+                  <a:txBody>
+                    <a:bodyPr wrap="square"/>
+                    <a:lstStyle/>
+                    <a:p>
+                      <a:pPr algn="r">
+                        <a:defRPr sz="950"/>
+                      </a:pPr>
+                      <a:r>
+                        <a:rPr b="1" sz="950">
+                          <a:solidFill>
+                            <a:srgbClr val="0F172A"/>
+                          </a:solidFill>
+                          <a:latin typeface="Aptos"/>
+                        </a:rPr>
+                        <a:t>0.00</a:t>
+                      </a:r>
+                    </a:p>
+                  </a:txBody>
+                  <a:tcPr marL="45720" marR="45720" marT="0" marB="0" anchor="ctr">
+                    <a:lnL w="12700" cap="flat" cmpd="sng" algn="ctr">
+                      <a:solidFill>
+                        <a:srgbClr val="FFFFFF"/>
+                      </a:solidFill>
+                      <a:prstDash val="solid"/>
+                    </a:lnL>
+                    <a:lnR w="12700" cap="flat" cmpd="sng" algn="ctr">
+                      <a:solidFill>
+                        <a:srgbClr val="FFFFFF"/>
+                      </a:solidFill>
+                      <a:prstDash val="solid"/>
+                    </a:lnR>
+                    <a:lnT w="12700" cap="flat" cmpd="sng" algn="ctr">
+                      <a:solidFill>
+                        <a:srgbClr val="FFFFFF"/>
+                      </a:solidFill>
+                      <a:prstDash val="solid"/>
+                    </a:lnT>
+                    <a:lnB w="12700" cap="flat" cmpd="sng" algn="ctr">
+                      <a:solidFill>
+                        <a:srgbClr val="FFFFFF"/>
+                      </a:solidFill>
+                      <a:prstDash val="solid"/>
+                    </a:lnB>
+                    <a:solidFill>
+                      <a:srgbClr val="F8FAFC"/>
+                    </a:solidFill>
+                  </a:tcPr>
+                </a:tc>
+                <a:tc>
+                  <a:txBody>
+                    <a:bodyPr wrap="square"/>
+                    <a:lstStyle/>
+                    <a:p>
+                      <a:pPr algn="r">
+                        <a:defRPr sz="950"/>
+                      </a:pPr>
+                      <a:r>
+                        <a:rPr b="1" sz="950">
+                          <a:solidFill>
+                            <a:srgbClr val="C00000"/>
+                          </a:solidFill>
+                          <a:latin typeface="Aptos"/>
+                        </a:rPr>
+                        <a:t>(193,746.06)</a:t>
+                      </a:r>
+                    </a:p>
+                  </a:txBody>
+                  <a:tcPr marL="45720" marR="45720" marT="0" marB="0" anchor="ctr">
+                    <a:lnL w="12700" cap="flat" cmpd="sng" algn="ctr">
+                      <a:solidFill>
+                        <a:srgbClr val="FFFFFF"/>
+                      </a:solidFill>
+                      <a:prstDash val="solid"/>
+                    </a:lnL>
+                    <a:lnR w="12700" cap="flat" cmpd="sng" algn="ctr">
+                      <a:solidFill>
+                        <a:srgbClr val="FFFFFF"/>
+                      </a:solidFill>
+                      <a:prstDash val="solid"/>
+                    </a:lnR>
+                    <a:lnT w="12700" cap="flat" cmpd="sng" algn="ctr">
+                      <a:solidFill>
+                        <a:srgbClr val="FFFFFF"/>
+                      </a:solidFill>
+                      <a:prstDash val="solid"/>
+                    </a:lnT>
+                    <a:lnB w="12700" cap="flat" cmpd="sng" algn="ctr">
+                      <a:solidFill>
+                        <a:srgbClr val="FFFFFF"/>
+                      </a:solidFill>
+                      <a:prstDash val="solid"/>
+                    </a:lnB>
+                    <a:solidFill>
+                      <a:srgbClr val="FFFFFF"/>
+                    </a:solidFill>
+                  </a:tcPr>
+                </a:tc>
+                <a:tc>
+                  <a:txBody>
+                    <a:bodyPr wrap="square"/>
+                    <a:lstStyle/>
+                    <a:p>
+                      <a:pPr algn="ctr">
+                        <a:defRPr sz="950"/>
+                      </a:pPr>
+                      <a:r>
+                        <a:rPr b="1" sz="950">
+                          <a:solidFill>
+                            <a:srgbClr val="0F172A"/>
+                          </a:solidFill>
+                          <a:latin typeface="Aptos"/>
+                        </a:rPr>
+                        <a:t>8.5%</a:t>
+                      </a:r>
+                    </a:p>
+                  </a:txBody>
+                  <a:tcPr marL="45720" marR="45720" marT="0" marB="0" anchor="ctr">
+                    <a:lnL w="12700" cap="flat" cmpd="sng" algn="ctr">
+                      <a:solidFill>
+                        <a:srgbClr val="FFFFFF"/>
+                      </a:solidFill>
+                      <a:prstDash val="solid"/>
+                    </a:lnL>
+                    <a:lnR w="12700" cap="flat" cmpd="sng" algn="ctr">
+                      <a:solidFill>
+                        <a:srgbClr val="FFFFFF"/>
+                      </a:solidFill>
+                      <a:prstDash val="solid"/>
+                    </a:lnR>
+                    <a:lnT w="12700" cap="flat" cmpd="sng" algn="ctr">
+                      <a:solidFill>
+                        <a:srgbClr val="FFFFFF"/>
+                      </a:solidFill>
+                      <a:prstDash val="solid"/>
+                    </a:lnT>
+                    <a:lnB w="12700" cap="flat" cmpd="sng" algn="ctr">
+                      <a:solidFill>
+                        <a:srgbClr val="FFFFFF"/>
+                      </a:solidFill>
+                      <a:prstDash val="solid"/>
+                    </a:lnB>
+                    <a:solidFill>
+                      <a:srgbClr val="DDF0F8"/>
+                    </a:solidFill>
+                  </a:tcPr>
+                </a:tc>
+                <a:tc>
+                  <a:txBody>
+                    <a:bodyPr wrap="square"/>
+                    <a:lstStyle/>
+                    <a:p>
+                      <a:pPr algn="l">
+                        <a:defRPr sz="950"/>
+                      </a:pPr>
+                      <a:r>
+                        <a:rPr b="1" sz="950">
+                          <a:solidFill>
+                            <a:srgbClr val="0F172A"/>
+                          </a:solidFill>
+                          <a:latin typeface="Aptos"/>
+                        </a:rPr>
+                        <a:t>Jul: Bebeks (investor fund Suhaib transferred)</a:t>
                       </a:r>
                     </a:p>
                   </a:txBody>
